--- a/outputs/GFCC7Jun2026_TheSolemnityoftheMostHolyBodyandBloodofChrist.pptx
+++ b/outputs/GFCC7Jun2026_TheSolemnityoftheMostHolyBodyandBloodofChrist.pptx
@@ -3169,7 +3169,7 @@
     <p:bg>
       <p:bgPr>
         <a:solidFill>
-          <a:srgbClr val="1F2430"/>
+          <a:srgbClr val="211733"/>
         </a:solidFill>
         <a:effectLst/>
       </p:bgPr>
@@ -3293,9 +3293,9 @@
               </a:spcBef>
               <a:defRPr sz="1200" b="0" i="0">
                 <a:solidFill>
-                  <a:srgbClr val="B8A1FF"/>
-                </a:solidFill>
-                <a:latin typeface="Inter"/>
+                  <a:srgbClr val="D8B4FE"/>
+                </a:solidFill>
+                <a:latin typeface="Georgia"/>
               </a:defRPr>
             </a:pPr>
             <a:r>
@@ -3318,7 +3318,7 @@
     <p:bg>
       <p:bgPr>
         <a:solidFill>
-          <a:srgbClr val="1F2430"/>
+          <a:srgbClr val="211733"/>
         </a:solidFill>
         <a:effectLst/>
       </p:bgPr>
@@ -3761,9 +3761,9 @@
               </a:spcBef>
               <a:defRPr sz="1200" b="0" i="0">
                 <a:solidFill>
-                  <a:srgbClr val="B8A1FF"/>
-                </a:solidFill>
-                <a:latin typeface="Inter"/>
+                  <a:srgbClr val="D8B4FE"/>
+                </a:solidFill>
+                <a:latin typeface="Georgia"/>
               </a:defRPr>
             </a:pPr>
             <a:r>
@@ -3786,7 +3786,7 @@
     <p:bg>
       <p:bgPr>
         <a:solidFill>
-          <a:srgbClr val="1F2430"/>
+          <a:srgbClr val="211733"/>
         </a:solidFill>
         <a:effectLst/>
       </p:bgPr>
@@ -4051,9 +4051,9 @@
               </a:spcBef>
               <a:defRPr sz="1200" b="0" i="0">
                 <a:solidFill>
-                  <a:srgbClr val="B8A1FF"/>
-                </a:solidFill>
-                <a:latin typeface="Inter"/>
+                  <a:srgbClr val="D8B4FE"/>
+                </a:solidFill>
+                <a:latin typeface="Georgia"/>
               </a:defRPr>
             </a:pPr>
             <a:r>
@@ -4076,7 +4076,7 @@
     <p:bg>
       <p:bgPr>
         <a:solidFill>
-          <a:srgbClr val="1F2430"/>
+          <a:srgbClr val="211733"/>
         </a:solidFill>
         <a:effectLst/>
       </p:bgPr>
@@ -4090,183 +4090,370 @@
       <p:grpSpPr/>
       <p:sp>
         <p:nvSpPr>
-          <p:cNvPr id="169" name="Google Shape;169;p22"/>
-          <p:cNvSpPr txBox="1"/>
-          <p:nvPr/>
-        </p:nvSpPr>
-        <p:spPr>
-          <a:xfrm>
-            <a:off x="3772800" y="1201100"/>
-            <a:ext cx="10742400" cy="8097900"/>
-          </a:xfrm>
-          <a:prstGeom prst="rect">
-            <a:avLst/>
-          </a:prstGeom>
-          <a:noFill/>
-          <a:ln>
-            <a:noFill/>
-          </a:ln>
-        </p:spPr>
-        <p:txBody>
-          <a:bodyPr anchorCtr="0" anchor="t" bIns="73150" lIns="109725" spcFirstLastPara="1" rIns="109725" wrap="square" tIns="73150">
+          <p:cNvPr name="TextBox 2" id="2"/>
+          <p:cNvSpPr txBox="true"/>
+          <p:nvPr/>
+        </p:nvSpPr>
+        <p:spPr>
+          <a:xfrm rot="0">
+            <a:off x="4801154" y="1896595"/>
+            <a:ext cx="9278336" cy="2320798"/>
+          </a:xfrm>
+          <a:prstGeom prst="rect">
+            <a:avLst/>
+          </a:prstGeom>
+        </p:spPr>
+        <p:txBody>
+          <a:bodyPr anchor="t" rtlCol="false" tIns="0" lIns="0" bIns="0" rIns="0">
             <a:spAutoFit/>
           </a:bodyPr>
           <a:lstStyle/>
           <a:p>
-            <a:pPr indent="0" lvl="0" marL="0" marR="0" rtl="0" algn="l">
+            <a:pPr algn="l">
+              <a:lnSpc>
+                <a:spcPts val="5935"/>
+              </a:lnSpc>
+              <a:defRPr/>
+            </a:pPr>
+            <a:r>
+              <a:rPr lang="en-US" b="1" sz="5600" spc="148">
+                <a:solidFill>
+                  <a:srgbClr val="FFFFFF"/>
+                </a:solidFill>
+                <a:latin typeface="Poppins Bold"/>
+                <a:ea typeface="Poppins Bold"/>
+                <a:cs typeface="Poppins Bold"/>
+                <a:sym typeface="Poppins Bold"/>
+              </a:rPr>
+              <a:t>LORD, HAVE MERCY.</a:t>
+            </a:r>
+          </a:p>
+          <a:p>
+            <a:pPr algn="l">
+              <a:lnSpc>
+                <a:spcPts val="5935"/>
+              </a:lnSpc>
+              <a:defRPr/>
+            </a:pPr>
+            <a:r>
+              <a:rPr lang="en-US" b="1" sz="5600" spc="148">
+                <a:solidFill>
+                  <a:srgbClr val="FFFFFF"/>
+                </a:solidFill>
+                <a:latin typeface="Poppins Bold"/>
+                <a:ea typeface="Poppins Bold"/>
+                <a:cs typeface="Poppins Bold"/>
+                <a:sym typeface="Poppins Bold"/>
+              </a:rPr>
+              <a:t>LORD, HAVE MERCY.</a:t>
+            </a:r>
+          </a:p>
+          <a:p>
+            <a:pPr algn="l" marL="0" indent="0" lvl="0">
+              <a:lnSpc>
+                <a:spcPts val="5935"/>
+              </a:lnSpc>
+              <a:defRPr/>
+            </a:pPr>
+            <a:r>
+              <a:rPr lang="en-US" b="1" sz="5600" spc="148">
+                <a:solidFill>
+                  <a:srgbClr val="FFFFFF"/>
+                </a:solidFill>
+                <a:latin typeface="Poppins Bold"/>
+                <a:ea typeface="Poppins Bold"/>
+                <a:cs typeface="Poppins Bold"/>
+                <a:sym typeface="Poppins Bold"/>
+              </a:rPr>
+              <a:t>           </a:t>
+            </a:r>
+            <a:r>
+              <a:rPr lang="en-US" b="1" sz="5600" spc="148">
+                <a:gradFill>
+                  <a:gsLst>
+                    <a:gs pos="0">
+                      <a:srgbClr val="FFDE59">
+                        <a:alpha val="100000"/>
+                      </a:srgbClr>
+                    </a:gs>
+                    <a:gs pos="100000">
+                      <a:srgbClr val="FF914D">
+                        <a:alpha val="100000"/>
+                      </a:srgbClr>
+                    </a:gs>
+                  </a:gsLst>
+                  <a:lin ang="0"/>
+                </a:gradFill>
+                <a:latin typeface="Poppins Bold"/>
+                <a:ea typeface="Poppins Bold"/>
+                <a:cs typeface="Poppins Bold"/>
+                <a:sym typeface="Poppins Bold"/>
+              </a:rPr>
+              <a:t>LORD, HAVE MERCY.</a:t>
+            </a:r>
+          </a:p>
+        </p:txBody>
+      </p:sp>
+      <p:sp>
+        <p:nvSpPr>
+          <p:cNvPr name="TextBox 3" id="3"/>
+          <p:cNvSpPr txBox="true"/>
+          <p:nvPr/>
+        </p:nvSpPr>
+        <p:spPr>
+          <a:xfrm rot="0">
+            <a:off x="4801154" y="4666484"/>
+            <a:ext cx="10374670" cy="2320798"/>
+          </a:xfrm>
+          <a:prstGeom prst="rect">
+            <a:avLst/>
+          </a:prstGeom>
+        </p:spPr>
+        <p:txBody>
+          <a:bodyPr anchor="t" rtlCol="false" tIns="0" lIns="0" bIns="0" rIns="0">
+            <a:spAutoFit/>
+          </a:bodyPr>
+          <a:lstStyle/>
+          <a:p>
+            <a:pPr algn="l">
+              <a:lnSpc>
+                <a:spcPts val="5935"/>
+              </a:lnSpc>
+              <a:defRPr/>
+            </a:pPr>
+            <a:r>
+              <a:rPr lang="en-US" b="1" sz="5600" spc="148">
+                <a:solidFill>
+                  <a:srgbClr val="FFFFFF"/>
+                </a:solidFill>
+                <a:latin typeface="Poppins Bold"/>
+                <a:ea typeface="Poppins Bold"/>
+                <a:cs typeface="Poppins Bold"/>
+                <a:sym typeface="Poppins Bold"/>
+              </a:rPr>
+              <a:t>CHRIST, HAVE MERCY.</a:t>
+            </a:r>
+          </a:p>
+          <a:p>
+            <a:pPr algn="l">
+              <a:lnSpc>
+                <a:spcPts val="5935"/>
+              </a:lnSpc>
+              <a:defRPr/>
+            </a:pPr>
+            <a:r>
+              <a:rPr lang="en-US" b="1" sz="5600" spc="148">
+                <a:solidFill>
+                  <a:srgbClr val="FFFFFF"/>
+                </a:solidFill>
+                <a:latin typeface="Poppins Bold"/>
+                <a:ea typeface="Poppins Bold"/>
+                <a:cs typeface="Poppins Bold"/>
+                <a:sym typeface="Poppins Bold"/>
+              </a:rPr>
+              <a:t>CHRIST, HAVE MERCY.</a:t>
+            </a:r>
+          </a:p>
+          <a:p>
+            <a:pPr algn="l" marL="0" indent="0" lvl="0">
+              <a:lnSpc>
+                <a:spcPts val="5935"/>
+              </a:lnSpc>
+              <a:defRPr/>
+            </a:pPr>
+            <a:r>
+              <a:rPr lang="en-US" b="1" sz="5600" spc="148">
+                <a:solidFill>
+                  <a:srgbClr val="FFFFFF"/>
+                </a:solidFill>
+                <a:latin typeface="Poppins Bold"/>
+                <a:ea typeface="Poppins Bold"/>
+                <a:cs typeface="Poppins Bold"/>
+                <a:sym typeface="Poppins Bold"/>
+              </a:rPr>
+              <a:t>           </a:t>
+            </a:r>
+            <a:r>
+              <a:rPr lang="en-US" b="1" sz="5600" spc="148">
+                <a:gradFill>
+                  <a:gsLst>
+                    <a:gs pos="0">
+                      <a:srgbClr val="FFDE59">
+                        <a:alpha val="100000"/>
+                      </a:srgbClr>
+                    </a:gs>
+                    <a:gs pos="100000">
+                      <a:srgbClr val="FF914D">
+                        <a:alpha val="100000"/>
+                      </a:srgbClr>
+                    </a:gs>
+                  </a:gsLst>
+                  <a:lin ang="0"/>
+                </a:gradFill>
+                <a:latin typeface="Poppins Bold"/>
+                <a:ea typeface="Poppins Bold"/>
+                <a:cs typeface="Poppins Bold"/>
+                <a:sym typeface="Poppins Bold"/>
+              </a:rPr>
+              <a:t>CHRIST, HAVE MERCY.</a:t>
+            </a:r>
+          </a:p>
+        </p:txBody>
+      </p:sp>
+      <p:sp>
+        <p:nvSpPr>
+          <p:cNvPr name="TextBox 4" id="4"/>
+          <p:cNvSpPr txBox="true"/>
+          <p:nvPr/>
+        </p:nvSpPr>
+        <p:spPr>
+          <a:xfrm rot="0">
+            <a:off x="4801154" y="7436374"/>
+            <a:ext cx="9575679" cy="2320798"/>
+          </a:xfrm>
+          <a:prstGeom prst="rect">
+            <a:avLst/>
+          </a:prstGeom>
+        </p:spPr>
+        <p:txBody>
+          <a:bodyPr anchor="t" rtlCol="false" tIns="0" lIns="0" bIns="0" rIns="0">
+            <a:spAutoFit/>
+          </a:bodyPr>
+          <a:lstStyle/>
+          <a:p>
+            <a:pPr algn="l">
+              <a:lnSpc>
+                <a:spcPts val="5935"/>
+              </a:lnSpc>
+              <a:defRPr/>
+            </a:pPr>
+            <a:r>
+              <a:rPr lang="en-US" b="1" sz="5600" spc="148">
+                <a:solidFill>
+                  <a:srgbClr val="FFFFFF"/>
+                </a:solidFill>
+                <a:latin typeface="Poppins Bold"/>
+                <a:ea typeface="Poppins Bold"/>
+                <a:cs typeface="Poppins Bold"/>
+                <a:sym typeface="Poppins Bold"/>
+              </a:rPr>
+              <a:t>LORD, HAVE MERCY.</a:t>
+            </a:r>
+          </a:p>
+          <a:p>
+            <a:pPr algn="l">
+              <a:lnSpc>
+                <a:spcPts val="5935"/>
+              </a:lnSpc>
+              <a:defRPr/>
+            </a:pPr>
+            <a:r>
+              <a:rPr lang="en-US" b="1" sz="5600" spc="148">
+                <a:solidFill>
+                  <a:srgbClr val="FFFFFF"/>
+                </a:solidFill>
+                <a:latin typeface="Poppins Bold"/>
+                <a:ea typeface="Poppins Bold"/>
+                <a:cs typeface="Poppins Bold"/>
+                <a:sym typeface="Poppins Bold"/>
+              </a:rPr>
+              <a:t>LORD, HAVE MERCY.</a:t>
+            </a:r>
+          </a:p>
+          <a:p>
+            <a:pPr algn="l" marL="0" indent="0" lvl="0">
+              <a:lnSpc>
+                <a:spcPts val="5935"/>
+              </a:lnSpc>
+              <a:defRPr/>
+            </a:pPr>
+            <a:r>
+              <a:rPr lang="en-US" b="1" sz="5600" spc="148">
+                <a:solidFill>
+                  <a:srgbClr val="FFFFFF"/>
+                </a:solidFill>
+                <a:latin typeface="Poppins Bold"/>
+                <a:ea typeface="Poppins Bold"/>
+                <a:cs typeface="Poppins Bold"/>
+                <a:sym typeface="Poppins Bold"/>
+              </a:rPr>
+              <a:t>           </a:t>
+            </a:r>
+            <a:r>
+              <a:rPr lang="en-US" b="1" sz="5600" spc="148">
+                <a:gradFill>
+                  <a:gsLst>
+                    <a:gs pos="0">
+                      <a:srgbClr val="FFDE59">
+                        <a:alpha val="100000"/>
+                      </a:srgbClr>
+                    </a:gs>
+                    <a:gs pos="100000">
+                      <a:srgbClr val="FF914D">
+                        <a:alpha val="100000"/>
+                      </a:srgbClr>
+                    </a:gs>
+                  </a:gsLst>
+                  <a:lin ang="0"/>
+                </a:gradFill>
+                <a:latin typeface="Poppins Bold"/>
+                <a:ea typeface="Poppins Bold"/>
+                <a:cs typeface="Poppins Bold"/>
+                <a:sym typeface="Poppins Bold"/>
+              </a:rPr>
+              <a:t>LORD, HAVE MERCY.</a:t>
+            </a:r>
+          </a:p>
+        </p:txBody>
+      </p:sp>
+      <p:sp>
+        <p:nvSpPr>
+          <p:cNvPr name="TextBox 5" id="5"/>
+          <p:cNvSpPr txBox="true"/>
+          <p:nvPr/>
+        </p:nvSpPr>
+        <p:spPr>
+          <a:xfrm rot="0">
+            <a:off x="2874744" y="331003"/>
+            <a:ext cx="12538511" cy="1055243"/>
+          </a:xfrm>
+          <a:prstGeom prst="rect">
+            <a:avLst/>
+          </a:prstGeom>
+        </p:spPr>
+        <p:txBody>
+          <a:bodyPr anchor="t" rtlCol="false" tIns="0" lIns="0" bIns="0" rIns="0">
+            <a:spAutoFit/>
+          </a:bodyPr>
+          <a:lstStyle/>
+          <a:p>
+            <a:pPr algn="ctr" marL="0" indent="0" lvl="0">
+              <a:lnSpc>
+                <a:spcPts val="8175"/>
+              </a:lnSpc>
               <a:spcBef>
-                <a:spcPts val="0"/>
+                <a:spcPct val="0"/>
               </a:spcBef>
-              <a:spcAft>
-                <a:spcPts val="0"/>
-              </a:spcAft>
-              <a:buNone/>
               <a:defRPr/>
             </a:pPr>
             <a:r>
-              <a:rPr b="1" i="0" lang="en-US" sz="8400" u="none" cap="none" strike="noStrike">
-                <a:solidFill>
-                  <a:srgbClr val="FAF8F4"/>
-                </a:solidFill>
-                <a:latin typeface="Calibri"/>
-                <a:ea typeface="Calibri"/>
-                <a:cs typeface="Calibri"/>
-                <a:sym typeface="Calibri"/>
+              <a:rPr lang="en-US" sz="3850">
+                <a:solidFill>
+                  <a:srgbClr val="FFB800"/>
+                </a:solidFill>
+                <a:latin typeface="Georgia"/>
+                <a:ea typeface="Recoleta"/>
+                <a:cs typeface="Recoleta"/>
+                <a:sym typeface="Recoleta"/>
               </a:rPr>
-              <a:t>Lord, have mercy.</a:t>
-            </a:r>
-            <a:endParaRPr sz="8400"/>
-          </a:p>
-          <a:p>
-            <a:pPr indent="457200" lvl="0" marL="914400" marR="0" rtl="0" algn="l">
-              <a:spcBef>
-                <a:spcPts val="0"/>
-              </a:spcBef>
-              <a:spcAft>
-                <a:spcPts val="0"/>
-              </a:spcAft>
-              <a:buNone/>
-              <a:defRPr/>
-            </a:pPr>
-            <a:r>
-              <a:rPr b="1" i="0" lang="en-US" sz="8400" u="none" cap="none" strike="noStrike">
-                <a:solidFill>
-                  <a:srgbClr val="FAF8F4"/>
-                </a:solidFill>
-                <a:latin typeface="Calibri"/>
-                <a:ea typeface="Calibri"/>
-                <a:cs typeface="Calibri"/>
-                <a:sym typeface="Calibri"/>
-              </a:rPr>
-              <a:t>Lord, have mercy.</a:t>
-            </a:r>
-            <a:endParaRPr sz="8400"/>
-          </a:p>
-          <a:p>
-            <a:pPr indent="0" lvl="0" marL="0" marR="0" rtl="0" algn="l">
-              <a:spcBef>
-                <a:spcPts val="0"/>
-              </a:spcBef>
-              <a:spcAft>
-                <a:spcPts val="0"/>
-              </a:spcAft>
-              <a:buNone/>
-              <a:defRPr/>
-            </a:pPr>
-            <a:r>
-              <a:rPr b="1" i="0" lang="en-US" sz="8400" u="none" cap="none" strike="noStrike">
-                <a:solidFill>
-                  <a:srgbClr val="FAF8F4"/>
-                </a:solidFill>
-                <a:latin typeface="Calibri"/>
-                <a:ea typeface="Calibri"/>
-                <a:cs typeface="Calibri"/>
-                <a:sym typeface="Calibri"/>
-              </a:rPr>
-              <a:t>Christ, have mercy.</a:t>
-            </a:r>
-            <a:endParaRPr sz="8400"/>
-          </a:p>
-          <a:p>
-            <a:pPr indent="457200" lvl="0" marL="914400" marR="0" rtl="0" algn="l">
-              <a:spcBef>
-                <a:spcPts val="500"/>
-              </a:spcBef>
-              <a:spcAft>
-                <a:spcPts val="0"/>
-              </a:spcAft>
-              <a:buNone/>
-              <a:defRPr/>
-            </a:pPr>
-            <a:r>
-              <a:rPr b="1" i="0" lang="en-US" sz="8400" u="none" cap="none" strike="noStrike">
-                <a:solidFill>
-                  <a:srgbClr val="FAF8F4"/>
-                </a:solidFill>
-                <a:latin typeface="Calibri"/>
-                <a:ea typeface="Calibri"/>
-                <a:cs typeface="Calibri"/>
-                <a:sym typeface="Calibri"/>
-              </a:rPr>
-              <a:t>Christ, have mercy.</a:t>
-            </a:r>
-            <a:endParaRPr sz="8400"/>
-          </a:p>
-          <a:p>
-            <a:pPr indent="0" lvl="0" marL="0" marR="0" rtl="0" algn="l">
-              <a:spcBef>
-                <a:spcPts val="500"/>
-              </a:spcBef>
-              <a:spcAft>
-                <a:spcPts val="0"/>
-              </a:spcAft>
-              <a:buNone/>
-              <a:defRPr/>
-            </a:pPr>
-            <a:r>
-              <a:rPr b="1" i="0" lang="en-US" sz="8400" u="none" cap="none" strike="noStrike">
-                <a:solidFill>
-                  <a:srgbClr val="FAF8F4"/>
-                </a:solidFill>
-                <a:latin typeface="Calibri"/>
-                <a:ea typeface="Calibri"/>
-                <a:cs typeface="Calibri"/>
-                <a:sym typeface="Calibri"/>
-              </a:rPr>
-              <a:t>Lord, have mercy.</a:t>
-            </a:r>
-            <a:endParaRPr sz="8400"/>
-          </a:p>
-          <a:p>
-            <a:pPr indent="457200" lvl="0" marL="914400" marR="0" rtl="0" algn="l">
-              <a:spcBef>
-                <a:spcPts val="500"/>
-              </a:spcBef>
-              <a:spcAft>
-                <a:spcPts val="0"/>
-              </a:spcAft>
-              <a:buNone/>
-              <a:defRPr/>
-            </a:pPr>
-            <a:r>
-              <a:rPr b="1" i="0" lang="en-US" sz="8400" u="none" cap="none" strike="noStrike">
-                <a:solidFill>
-                  <a:srgbClr val="FAF8F4"/>
-                </a:solidFill>
-                <a:latin typeface="Calibri"/>
-                <a:ea typeface="Calibri"/>
-                <a:cs typeface="Calibri"/>
-                <a:sym typeface="Calibri"/>
-              </a:rPr>
-              <a:t>Lord, have mercy.</a:t>
-            </a:r>
-            <a:endParaRPr sz="8400"/>
-          </a:p>
-        </p:txBody>
-      </p:sp>
-      <p:sp>
-        <p:nvSpPr>
-          <p:cNvPr id="170" name="TextBox 169"/>
+              <a:t>Kyrie Eleison</a:t>
+            </a:r>
+          </a:p>
+        </p:txBody>
+      </p:sp>
+      <p:sp>
+        <p:nvSpPr>
+          <p:cNvPr id="6" name="TextBox 5"/>
           <p:cNvSpPr txBox="1"/>
           <p:nvPr/>
         </p:nvSpPr>
@@ -4293,9 +4480,9 @@
               </a:spcBef>
               <a:defRPr sz="1200" b="0" i="0">
                 <a:solidFill>
-                  <a:srgbClr val="B8A1FF"/>
-                </a:solidFill>
-                <a:latin typeface="Inter"/>
+                  <a:srgbClr val="D8B4FE"/>
+                </a:solidFill>
+                <a:latin typeface="Georgia"/>
               </a:defRPr>
             </a:pPr>
             <a:r>
@@ -4318,7 +4505,7 @@
     <p:bg>
       <p:bgPr>
         <a:solidFill>
-          <a:srgbClr val="1F2430"/>
+          <a:srgbClr val="211733"/>
         </a:solidFill>
         <a:effectLst/>
       </p:bgPr>
@@ -4614,9 +4801,9 @@
               </a:spcBef>
               <a:defRPr sz="1200" b="0" i="0">
                 <a:solidFill>
-                  <a:srgbClr val="B8A1FF"/>
-                </a:solidFill>
-                <a:latin typeface="Inter"/>
+                  <a:srgbClr val="D8B4FE"/>
+                </a:solidFill>
+                <a:latin typeface="Georgia"/>
               </a:defRPr>
             </a:pPr>
             <a:r>
@@ -4639,7 +4826,7 @@
     <p:bg>
       <p:bgPr>
         <a:solidFill>
-          <a:srgbClr val="1F2430"/>
+          <a:srgbClr val="211733"/>
         </a:solidFill>
         <a:effectLst/>
       </p:bgPr>
@@ -4940,9 +5127,9 @@
               </a:spcBef>
               <a:defRPr sz="1200" b="0" i="0">
                 <a:solidFill>
-                  <a:srgbClr val="B8A1FF"/>
-                </a:solidFill>
-                <a:latin typeface="Inter"/>
+                  <a:srgbClr val="D8B4FE"/>
+                </a:solidFill>
+                <a:latin typeface="Georgia"/>
               </a:defRPr>
             </a:pPr>
             <a:r>
@@ -4965,7 +5152,7 @@
     <p:bg>
       <p:bgPr>
         <a:solidFill>
-          <a:srgbClr val="1F2430"/>
+          <a:srgbClr val="211733"/>
         </a:solidFill>
         <a:effectLst/>
       </p:bgPr>
@@ -5317,9 +5504,9 @@
               </a:spcBef>
               <a:defRPr sz="1200" b="0" i="0">
                 <a:solidFill>
-                  <a:srgbClr val="B8A1FF"/>
-                </a:solidFill>
-                <a:latin typeface="Inter"/>
+                  <a:srgbClr val="D8B4FE"/>
+                </a:solidFill>
+                <a:latin typeface="Georgia"/>
               </a:defRPr>
             </a:pPr>
             <a:r>
@@ -5342,7 +5529,7 @@
     <p:bg>
       <p:bgPr>
         <a:solidFill>
-          <a:srgbClr val="1F2430"/>
+          <a:srgbClr val="211733"/>
         </a:solidFill>
         <a:effectLst/>
       </p:bgPr>
@@ -5530,9 +5717,9 @@
               </a:spcBef>
               <a:defRPr sz="1200" b="0" i="0">
                 <a:solidFill>
-                  <a:srgbClr val="B8A1FF"/>
-                </a:solidFill>
-                <a:latin typeface="Inter"/>
+                  <a:srgbClr val="D8B4FE"/>
+                </a:solidFill>
+                <a:latin typeface="Georgia"/>
               </a:defRPr>
             </a:pPr>
             <a:r>
@@ -5555,7 +5742,7 @@
     <p:bg>
       <p:bgPr>
         <a:solidFill>
-          <a:srgbClr val="1F2430"/>
+          <a:srgbClr val="211733"/>
         </a:solidFill>
         <a:effectLst/>
       </p:bgPr>
@@ -5598,9 +5785,9 @@
               </a:spcAft>
               <a:defRPr sz="5500" b="1" i="0">
                 <a:solidFill>
-                  <a:srgbClr val="B8A1FF"/>
-                </a:solidFill>
-                <a:latin typeface="Inter"/>
+                  <a:srgbClr val="D8B4FE"/>
+                </a:solidFill>
+                <a:latin typeface="Georgia"/>
               </a:defRPr>
             </a:pPr>
             <a:r>
@@ -5617,9 +5804,9 @@
               </a:spcAft>
               <a:defRPr sz="5500" b="1" i="0">
                 <a:solidFill>
-                  <a:srgbClr val="F3F4F6"/>
-                </a:solidFill>
-                <a:latin typeface="Inter"/>
+                  <a:srgbClr val="FFFFFF"/>
+                </a:solidFill>
+                <a:latin typeface="Georgia"/>
               </a:defRPr>
             </a:pPr>
             <a:r>
@@ -5657,9 +5844,9 @@
               </a:spcBef>
               <a:defRPr sz="1200" b="0" i="0">
                 <a:solidFill>
-                  <a:srgbClr val="B8A1FF"/>
-                </a:solidFill>
-                <a:latin typeface="Inter"/>
+                  <a:srgbClr val="D8B4FE"/>
+                </a:solidFill>
+                <a:latin typeface="Georgia"/>
               </a:defRPr>
             </a:pPr>
             <a:r>
@@ -5679,14 +5866,6 @@
 <file path=ppt/slides/slide18.xml><?xml version="1.0" encoding="utf-8"?>
 <p:sld xmlns:a="http://schemas.openxmlformats.org/drawingml/2006/main" xmlns:p="http://schemas.openxmlformats.org/presentationml/2006/main" xmlns:r="http://schemas.openxmlformats.org/officeDocument/2006/relationships">
   <p:cSld>
-    <p:bg>
-      <p:bgPr>
-        <a:solidFill>
-          <a:srgbClr val="1F2430"/>
-        </a:solidFill>
-        <a:effectLst/>
-      </p:bgPr>
-    </p:bg>
     <p:spTree>
       <p:nvGrpSpPr>
         <p:cNvPr id="1" name=""/>
@@ -5694,46 +5873,30 @@
         <p:nvPr/>
       </p:nvGrpSpPr>
       <p:grpSpPr/>
-      <p:sp>
-        <p:nvSpPr>
-          <p:cNvPr id="2" name="TextBox 1"/>
-          <p:cNvSpPr txBox="1"/>
-          <p:nvPr/>
-        </p:nvSpPr>
-        <p:spPr>
-          <a:xfrm>
-            <a:off x="914400" y="758952"/>
-            <a:ext cx="16459200" cy="4114800"/>
-          </a:xfrm>
-          <a:prstGeom prst="rect">
-            <a:avLst/>
-          </a:prstGeom>
-          <a:noFill/>
-        </p:spPr>
-        <p:txBody>
-          <a:bodyPr wrap="square" lIns="109728" rIns="109728" tIns="73152" bIns="73152">
-            <a:noAutofit/>
-          </a:bodyPr>
-          <a:lstStyle/>
-          <a:p>
-            <a:pPr algn="ctr">
-              <a:defRPr sz="5500" b="1" i="0">
-                <a:solidFill>
-                  <a:srgbClr val="B8A1FF"/>
-                </a:solidFill>
-                <a:latin typeface="Inter"/>
-              </a:defRPr>
-            </a:pPr>
-            <a:r>
-              <a:t>LITURGY OF</a:t>
-            </a:r>
-            <a:br/>
-            <a:r>
-              <a:t>THE WORD</a:t>
-            </a:r>
-          </a:p>
-        </p:txBody>
-      </p:sp>
+      <p:pic>
+        <p:nvPicPr>
+          <p:cNvPr id="2" name="Picture 1" descr="liturgy_of_the_word_title.png"/>
+          <p:cNvPicPr>
+            <a:picLocks noChangeAspect="1"/>
+          </p:cNvPicPr>
+          <p:nvPr/>
+        </p:nvPicPr>
+        <p:blipFill>
+          <a:blip r:embed="rId2"/>
+          <a:stretch>
+            <a:fillRect/>
+          </a:stretch>
+        </p:blipFill>
+        <p:spPr>
+          <a:xfrm>
+            <a:off x="0" y="0"/>
+            <a:ext cx="18288000" cy="10287000"/>
+          </a:xfrm>
+          <a:prstGeom prst="rect">
+            <a:avLst/>
+          </a:prstGeom>
+        </p:spPr>
+      </p:pic>
       <p:sp>
         <p:nvSpPr>
           <p:cNvPr id="3" name="TextBox 2"/>
@@ -5763,9 +5926,9 @@
               </a:spcBef>
               <a:defRPr sz="1200" b="0" i="0">
                 <a:solidFill>
-                  <a:srgbClr val="B8A1FF"/>
-                </a:solidFill>
-                <a:latin typeface="Inter"/>
+                  <a:srgbClr val="D8B4FE"/>
+                </a:solidFill>
+                <a:latin typeface="Georgia"/>
               </a:defRPr>
             </a:pPr>
             <a:r>
@@ -5788,7 +5951,7 @@
     <p:bg>
       <p:bgPr>
         <a:solidFill>
-          <a:srgbClr val="1F2430"/>
+          <a:srgbClr val="211733"/>
         </a:solidFill>
         <a:effectLst/>
       </p:bgPr>
@@ -5828,9 +5991,9 @@
               </a:spcAft>
               <a:defRPr sz="5500" b="1" i="0">
                 <a:solidFill>
-                  <a:srgbClr val="B8A1FF"/>
-                </a:solidFill>
-                <a:latin typeface="Inter"/>
+                  <a:srgbClr val="D8B4FE"/>
+                </a:solidFill>
+                <a:latin typeface="Georgia"/>
               </a:defRPr>
             </a:pPr>
             <a:r>
@@ -5844,9 +6007,9 @@
               </a:spcAft>
               <a:defRPr sz="5500" b="1" i="0">
                 <a:solidFill>
-                  <a:srgbClr val="B8A1FF"/>
-                </a:solidFill>
-                <a:latin typeface="Inter"/>
+                  <a:srgbClr val="D8B4FE"/>
+                </a:solidFill>
+                <a:latin typeface="Georgia"/>
               </a:defRPr>
             </a:pPr>
             <a:r>
@@ -5857,9 +6020,9 @@
             <a:pPr algn="ctr">
               <a:defRPr sz="5500" b="0" i="0">
                 <a:solidFill>
-                  <a:srgbClr val="F3F4F6"/>
-                </a:solidFill>
-                <a:latin typeface="Inter"/>
+                  <a:srgbClr val="FFFFFF"/>
+                </a:solidFill>
+                <a:latin typeface="Georgia"/>
               </a:defRPr>
             </a:pPr>
             <a:r>
@@ -5897,9 +6060,9 @@
               </a:spcBef>
               <a:defRPr sz="1200" b="0" i="0">
                 <a:solidFill>
-                  <a:srgbClr val="B8A1FF"/>
-                </a:solidFill>
-                <a:latin typeface="Inter"/>
+                  <a:srgbClr val="D8B4FE"/>
+                </a:solidFill>
+                <a:latin typeface="Georgia"/>
               </a:defRPr>
             </a:pPr>
             <a:r>
@@ -5922,7 +6085,7 @@
     <p:bg>
       <p:bgPr>
         <a:solidFill>
-          <a:srgbClr val="1F2430"/>
+          <a:srgbClr val="211733"/>
         </a:solidFill>
         <a:effectLst/>
       </p:bgPr>
@@ -5962,7 +6125,7 @@
               </a:lnSpc>
               <a:defRPr sz="2800" b="1" i="0">
                 <a:solidFill>
-                  <a:srgbClr val="B8A1FF"/>
+                  <a:srgbClr val="D8B4FE"/>
                 </a:solidFill>
                 <a:latin typeface="Aptos"/>
               </a:defRPr>
@@ -6001,7 +6164,7 @@
               </a:lnSpc>
               <a:defRPr sz="2600" b="0" i="0">
                 <a:solidFill>
-                  <a:srgbClr val="7C3AED"/>
+                  <a:srgbClr val="F8C66A"/>
                 </a:solidFill>
                 <a:latin typeface="Aptos"/>
               </a:defRPr>
@@ -6040,7 +6203,7 @@
               </a:lnSpc>
               <a:defRPr sz="7200" b="1" i="0">
                 <a:solidFill>
-                  <a:srgbClr val="F3F4F6"/>
+                  <a:srgbClr val="FFFFFF"/>
                 </a:solidFill>
                 <a:latin typeface="Aptos Display"/>
               </a:defRPr>
@@ -6079,7 +6242,7 @@
               </a:lnSpc>
               <a:defRPr sz="4000" b="0" i="0">
                 <a:solidFill>
-                  <a:srgbClr val="7C3AED"/>
+                  <a:srgbClr val="F8C66A"/>
                 </a:solidFill>
                 <a:latin typeface="Aptos"/>
               </a:defRPr>
@@ -6118,7 +6281,7 @@
               </a:lnSpc>
               <a:defRPr sz="3000" b="0" i="0">
                 <a:solidFill>
-                  <a:srgbClr val="7C3AED"/>
+                  <a:srgbClr val="F8C66A"/>
                 </a:solidFill>
                 <a:latin typeface="Aptos"/>
               </a:defRPr>
@@ -6154,7 +6317,7 @@
             <a:pPr algn="ctr">
               <a:defRPr sz="1800" b="0" i="0">
                 <a:solidFill>
-                  <a:srgbClr val="7C3AED"/>
+                  <a:srgbClr val="F8C66A"/>
                 </a:solidFill>
                 <a:latin typeface="Aptos"/>
               </a:defRPr>
@@ -6179,7 +6342,7 @@
     <p:bg>
       <p:bgPr>
         <a:solidFill>
-          <a:srgbClr val="1F2430"/>
+          <a:srgbClr val="211733"/>
         </a:solidFill>
         <a:effectLst/>
       </p:bgPr>
@@ -6219,9 +6382,9 @@
               </a:spcAft>
               <a:defRPr sz="5500" b="1" i="0">
                 <a:solidFill>
-                  <a:srgbClr val="B8A1FF"/>
-                </a:solidFill>
-                <a:latin typeface="Inter"/>
+                  <a:srgbClr val="D8B4FE"/>
+                </a:solidFill>
+                <a:latin typeface="Georgia"/>
               </a:defRPr>
             </a:pPr>
             <a:r>
@@ -6235,9 +6398,9 @@
               </a:spcAft>
               <a:defRPr sz="5500" b="1" i="0">
                 <a:solidFill>
-                  <a:srgbClr val="B8A1FF"/>
-                </a:solidFill>
-                <a:latin typeface="Inter"/>
+                  <a:srgbClr val="D8B4FE"/>
+                </a:solidFill>
+                <a:latin typeface="Georgia"/>
               </a:defRPr>
             </a:pPr>
             <a:r>
@@ -6255,9 +6418,9 @@
               </a:spcAft>
               <a:defRPr sz="5500" b="0" i="0">
                 <a:solidFill>
-                  <a:srgbClr val="F3F4F6"/>
-                </a:solidFill>
-                <a:latin typeface="Inter"/>
+                  <a:srgbClr val="FFFFFF"/>
+                </a:solidFill>
+                <a:latin typeface="Georgia"/>
               </a:defRPr>
             </a:pPr>
             <a:r>
@@ -6295,9 +6458,9 @@
               </a:spcBef>
               <a:defRPr sz="1200" b="0" i="0">
                 <a:solidFill>
-                  <a:srgbClr val="B8A1FF"/>
-                </a:solidFill>
-                <a:latin typeface="Inter"/>
+                  <a:srgbClr val="D8B4FE"/>
+                </a:solidFill>
+                <a:latin typeface="Georgia"/>
               </a:defRPr>
             </a:pPr>
             <a:r>
@@ -6320,7 +6483,7 @@
     <p:bg>
       <p:bgPr>
         <a:solidFill>
-          <a:srgbClr val="1F2430"/>
+          <a:srgbClr val="211733"/>
         </a:solidFill>
         <a:effectLst/>
       </p:bgPr>
@@ -6360,9 +6523,9 @@
               </a:spcAft>
               <a:defRPr sz="5500" b="1" i="0">
                 <a:solidFill>
-                  <a:srgbClr val="B8A1FF"/>
-                </a:solidFill>
-                <a:latin typeface="Inter"/>
+                  <a:srgbClr val="D8B4FE"/>
+                </a:solidFill>
+                <a:latin typeface="Georgia"/>
               </a:defRPr>
             </a:pPr>
             <a:r>
@@ -6376,9 +6539,9 @@
               </a:spcAft>
               <a:defRPr sz="5500" b="1" i="0">
                 <a:solidFill>
-                  <a:srgbClr val="B8A1FF"/>
-                </a:solidFill>
-                <a:latin typeface="Inter"/>
+                  <a:srgbClr val="D8B4FE"/>
+                </a:solidFill>
+                <a:latin typeface="Georgia"/>
               </a:defRPr>
             </a:pPr>
             <a:r>
@@ -6389,9 +6552,9 @@
             <a:pPr algn="ctr">
               <a:defRPr sz="5500" b="0" i="0">
                 <a:solidFill>
-                  <a:srgbClr val="F3F4F6"/>
-                </a:solidFill>
-                <a:latin typeface="Inter"/>
+                  <a:srgbClr val="FFFFFF"/>
+                </a:solidFill>
+                <a:latin typeface="Georgia"/>
               </a:defRPr>
             </a:pPr>
             <a:r>
@@ -6429,9 +6592,9 @@
               </a:spcBef>
               <a:defRPr sz="1200" b="0" i="0">
                 <a:solidFill>
-                  <a:srgbClr val="B8A1FF"/>
-                </a:solidFill>
-                <a:latin typeface="Inter"/>
+                  <a:srgbClr val="D8B4FE"/>
+                </a:solidFill>
+                <a:latin typeface="Georgia"/>
               </a:defRPr>
             </a:pPr>
             <a:r>
@@ -6454,7 +6617,7 @@
     <p:bg>
       <p:bgPr>
         <a:solidFill>
-          <a:srgbClr val="1F2430"/>
+          <a:srgbClr val="211733"/>
         </a:solidFill>
         <a:effectLst/>
       </p:bgPr>
@@ -6468,46 +6631,157 @@
       <p:grpSpPr/>
       <p:sp>
         <p:nvSpPr>
-          <p:cNvPr id="2" name="TextBox 1"/>
-          <p:cNvSpPr txBox="1"/>
-          <p:nvPr/>
-        </p:nvSpPr>
-        <p:spPr>
-          <a:xfrm>
-            <a:off x="914400" y="530352"/>
-            <a:ext cx="16459200" cy="8750808"/>
-          </a:xfrm>
-          <a:prstGeom prst="rect">
-            <a:avLst/>
-          </a:prstGeom>
-          <a:noFill/>
-        </p:spPr>
-        <p:txBody>
-          <a:bodyPr wrap="square" lIns="109728" rIns="109728" tIns="73152" bIns="73152">
-            <a:noAutofit/>
-          </a:bodyPr>
-          <a:lstStyle/>
-          <a:p>
-            <a:pPr algn="ctr">
-              <a:spcAft>
-                <a:spcPts val="500"/>
-              </a:spcAft>
-              <a:defRPr sz="5500" b="1" i="0">
-                <a:solidFill>
-                  <a:srgbClr val="F3F4F6"/>
-                </a:solidFill>
-                <a:latin typeface="Inter"/>
-              </a:defRPr>
-            </a:pPr>
-            <a:r>
-              <a:t>ALLELUIA! ALLELUIA! ALLELUIA! ALLELUIA!</a:t>
-            </a:r>
-          </a:p>
-        </p:txBody>
-      </p:sp>
-      <p:sp>
-        <p:nvSpPr>
-          <p:cNvPr id="3" name="TextBox 2"/>
+          <p:cNvPr name="TextBox 2" id="2"/>
+          <p:cNvSpPr txBox="true"/>
+          <p:nvPr/>
+        </p:nvSpPr>
+        <p:spPr>
+          <a:xfrm rot="0">
+            <a:off x="0" y="2602230"/>
+            <a:ext cx="18288000" cy="4892041"/>
+          </a:xfrm>
+          <a:prstGeom prst="rect">
+            <a:avLst/>
+          </a:prstGeom>
+        </p:spPr>
+        <p:txBody>
+          <a:bodyPr anchor="t" rtlCol="false" tIns="0" lIns="0" bIns="0" rIns="0">
+            <a:noAutofit/>
+          </a:bodyPr>
+          <a:lstStyle/>
+          <a:p>
+            <a:pPr algn="ctr">
+              <a:lnSpc>
+                <a:spcPts val="9659"/>
+              </a:lnSpc>
+              <a:defRPr/>
+            </a:pPr>
+            <a:r>
+              <a:rPr lang="en-US" b="1" sz="6900">
+                <a:solidFill>
+                  <a:srgbClr val="FFFFFF"/>
+                </a:solidFill>
+                <a:latin typeface="Poppins Bold"/>
+                <a:ea typeface="Poppins Bold"/>
+                <a:cs typeface="Poppins Bold"/>
+                <a:sym typeface="Poppins Bold"/>
+              </a:rPr>
+              <a:t>ALLELUIA! ALLELUIA!</a:t>
+            </a:r>
+          </a:p>
+          <a:p>
+            <a:pPr algn="ctr">
+              <a:lnSpc>
+                <a:spcPts val="9659"/>
+              </a:lnSpc>
+              <a:defRPr/>
+            </a:pPr>
+            <a:r>
+              <a:rPr lang="en-US" b="1" sz="6900">
+                <a:solidFill>
+                  <a:srgbClr val="FFFFFF"/>
+                </a:solidFill>
+                <a:latin typeface="Poppins Bold"/>
+                <a:ea typeface="Poppins Bold"/>
+                <a:cs typeface="Poppins Bold"/>
+                <a:sym typeface="Poppins Bold"/>
+              </a:rPr>
+              <a:t>ALLELUIA! ALLELUIA!</a:t>
+            </a:r>
+          </a:p>
+          <a:p>
+            <a:pPr algn="ctr">
+              <a:lnSpc>
+                <a:spcPts val="9659"/>
+              </a:lnSpc>
+              <a:defRPr/>
+            </a:pPr>
+            <a:r>
+              <a:rPr lang="en-US" b="1" sz="6900">
+                <a:solidFill>
+                  <a:srgbClr val="FFFFFF"/>
+                </a:solidFill>
+                <a:latin typeface="Poppins Bold"/>
+                <a:ea typeface="Poppins Bold"/>
+                <a:cs typeface="Poppins Bold"/>
+                <a:sym typeface="Poppins Bold"/>
+              </a:rPr>
+              <a:t>ALLELUIA! ALLELUIA!</a:t>
+            </a:r>
+          </a:p>
+          <a:p>
+            <a:pPr algn="ctr" marL="0" indent="0" lvl="0">
+              <a:lnSpc>
+                <a:spcPts val="9659"/>
+              </a:lnSpc>
+              <a:spcBef>
+                <a:spcPct val="0"/>
+              </a:spcBef>
+              <a:defRPr/>
+            </a:pPr>
+            <a:r>
+              <a:rPr lang="en-US" b="1" sz="6900">
+                <a:solidFill>
+                  <a:srgbClr val="FFFFFF"/>
+                </a:solidFill>
+                <a:latin typeface="Poppins Bold"/>
+                <a:ea typeface="Poppins Bold"/>
+                <a:cs typeface="Poppins Bold"/>
+                <a:sym typeface="Poppins Bold"/>
+              </a:rPr>
+              <a:t>ALLELUIA! ALLELUIA!</a:t>
+            </a:r>
+          </a:p>
+        </p:txBody>
+      </p:sp>
+      <p:sp>
+        <p:nvSpPr>
+          <p:cNvPr name="TextBox 3" id="3"/>
+          <p:cNvSpPr txBox="true"/>
+          <p:nvPr/>
+        </p:nvSpPr>
+        <p:spPr>
+          <a:xfrm rot="0">
+            <a:off x="2874744" y="331003"/>
+            <a:ext cx="12538511" cy="1055243"/>
+          </a:xfrm>
+          <a:prstGeom prst="rect">
+            <a:avLst/>
+          </a:prstGeom>
+        </p:spPr>
+        <p:txBody>
+          <a:bodyPr anchor="t" rtlCol="false" tIns="0" lIns="0" bIns="0" rIns="0">
+            <a:noAutofit/>
+          </a:bodyPr>
+          <a:lstStyle/>
+          <a:p>
+            <a:pPr algn="ctr" marL="0" indent="0" lvl="0">
+              <a:lnSpc>
+                <a:spcPts val="8175"/>
+              </a:lnSpc>
+              <a:spcBef>
+                <a:spcPct val="0"/>
+              </a:spcBef>
+              <a:defRPr/>
+            </a:pPr>
+            <a:r>
+              <a:rPr lang="en-US" sz="3850">
+                <a:solidFill>
+                  <a:srgbClr val="FFB800"/>
+                </a:solidFill>
+                <a:latin typeface="Georgia"/>
+                <a:ea typeface="Recoleta"/>
+                <a:cs typeface="Recoleta"/>
+                <a:sym typeface="Recoleta"/>
+              </a:rPr>
+              <a:t>Gospel Acclamation</a:t>
+            </a:r>
+          </a:p>
+        </p:txBody>
+      </p:sp>
+      <p:sp>
+        <p:nvSpPr>
+          <p:cNvPr id="4" name="TextBox 3"/>
           <p:cNvSpPr txBox="1"/>
           <p:nvPr/>
         </p:nvSpPr>
@@ -6534,13 +6808,13 @@
               </a:spcBef>
               <a:defRPr sz="1200" b="0" i="0">
                 <a:solidFill>
-                  <a:srgbClr val="B8A1FF"/>
-                </a:solidFill>
-                <a:latin typeface="Inter"/>
-              </a:defRPr>
-            </a:pPr>
-            <a:r>
-              <a:t>Gospel Acclamation</a:t>
+                  <a:srgbClr val="D8B4FE"/>
+                </a:solidFill>
+                <a:latin typeface="Georgia"/>
+              </a:defRPr>
+            </a:pPr>
+            <a:r>
+              <a:t>Gospel Acclamation (1/2)</a:t>
             </a:r>
           </a:p>
         </p:txBody>
@@ -6559,7 +6833,7 @@
     <p:bg>
       <p:bgPr>
         <a:solidFill>
-          <a:srgbClr val="1F2430"/>
+          <a:srgbClr val="211733"/>
         </a:solidFill>
         <a:effectLst/>
       </p:bgPr>
@@ -6573,87 +6847,237 @@
       <p:grpSpPr/>
       <p:sp>
         <p:nvSpPr>
-          <p:cNvPr id="2" name="TextBox 1"/>
-          <p:cNvSpPr txBox="1"/>
-          <p:nvPr/>
-        </p:nvSpPr>
-        <p:spPr>
-          <a:xfrm>
-            <a:off x="914400" y="530352"/>
-            <a:ext cx="16459200" cy="8750808"/>
-          </a:xfrm>
-          <a:prstGeom prst="rect">
-            <a:avLst/>
-          </a:prstGeom>
-          <a:noFill/>
-        </p:spPr>
-        <p:txBody>
-          <a:bodyPr wrap="square" lIns="109728" rIns="109728" tIns="73152" bIns="73152">
-            <a:noAutofit/>
-          </a:bodyPr>
-          <a:lstStyle/>
-          <a:p>
-            <a:pPr algn="ctr">
+          <p:cNvPr name="TextBox 2" id="2"/>
+          <p:cNvSpPr txBox="true"/>
+          <p:nvPr/>
+        </p:nvSpPr>
+        <p:spPr>
+          <a:xfrm rot="0">
+            <a:off x="2741394" y="2126857"/>
+            <a:ext cx="12101674" cy="1227455"/>
+          </a:xfrm>
+          <a:prstGeom prst="rect">
+            <a:avLst/>
+          </a:prstGeom>
+        </p:spPr>
+        <p:txBody>
+          <a:bodyPr anchor="t" rtlCol="false" tIns="0" lIns="0" bIns="0" rIns="0">
+            <a:noAutofit/>
+          </a:bodyPr>
+          <a:lstStyle/>
+          <a:p>
+            <a:pPr algn="l" marL="0" indent="0" lvl="0">
+              <a:lnSpc>
+                <a:spcPts val="9520"/>
+              </a:lnSpc>
               <a:spcBef>
-                <a:spcPts val="400"/>
+                <a:spcPct val="0"/>
               </a:spcBef>
-              <a:spcAft>
-                <a:spcPts val="500"/>
-              </a:spcAft>
-              <a:defRPr sz="5500" b="1" i="0">
-                <a:solidFill>
-                  <a:srgbClr val="B8A1FF"/>
-                </a:solidFill>
-                <a:latin typeface="Inter"/>
-              </a:defRPr>
-            </a:pPr>
-            <a:r>
-              <a:t>Priest: The Lord be with you.</a:t>
-            </a:r>
-          </a:p>
-          <a:p>
-            <a:pPr algn="ctr">
+              <a:defRPr/>
+            </a:pPr>
+            <a:r>
+              <a:rPr lang="en-US" b="1" sz="6900">
+                <a:solidFill>
+                  <a:srgbClr val="FFB800"/>
+                </a:solidFill>
+                <a:latin typeface="Poppins Bold"/>
+                <a:ea typeface="Poppins Semi-Bold"/>
+                <a:cs typeface="Poppins Semi-Bold"/>
+                <a:sym typeface="Poppins Semi-Bold"/>
+              </a:rPr>
+              <a:t>Priest</a:t>
+            </a:r>
+            <a:r>
+              <a:rPr lang="en-US" b="1" sz="6900">
+                <a:solidFill>
+                  <a:srgbClr val="FFFFFF"/>
+                </a:solidFill>
+                <a:latin typeface="Poppins Bold"/>
+                <a:ea typeface="Poppins Semi-Bold"/>
+                <a:cs typeface="Poppins Semi-Bold"/>
+                <a:sym typeface="Poppins Semi-Bold"/>
+              </a:rPr>
+              <a:t>: The Lord be with you.</a:t>
+            </a:r>
+          </a:p>
+        </p:txBody>
+      </p:sp>
+      <p:sp>
+        <p:nvSpPr>
+          <p:cNvPr name="TextBox 3" id="3"/>
+          <p:cNvSpPr txBox="true"/>
+          <p:nvPr/>
+        </p:nvSpPr>
+        <p:spPr>
+          <a:xfrm rot="0">
+            <a:off x="2741394" y="5586337"/>
+            <a:ext cx="14802275" cy="1860423"/>
+          </a:xfrm>
+          <a:prstGeom prst="rect">
+            <a:avLst/>
+          </a:prstGeom>
+        </p:spPr>
+        <p:txBody>
+          <a:bodyPr anchor="t" rtlCol="false" tIns="0" lIns="0" bIns="0" rIns="0">
+            <a:noAutofit/>
+          </a:bodyPr>
+          <a:lstStyle/>
+          <a:p>
+            <a:r>
+              <a:rPr sz="6900" b="1">
+                <a:latin typeface="Poppins Bold"/>
+              </a:rPr>
+              <a:t>Priest: A reading from the holy</a:t>
+            </a:r>
+          </a:p>
+          <a:p>
+            <a:r>
+              <a:rPr sz="6900" b="1">
+                <a:latin typeface="Poppins Bold"/>
+              </a:rPr>
+              <a:t>Gospel according to John.</a:t>
+            </a:r>
+          </a:p>
+        </p:txBody>
+      </p:sp>
+      <p:sp>
+        <p:nvSpPr>
+          <p:cNvPr name="TextBox 4" id="4"/>
+          <p:cNvSpPr txBox="true"/>
+          <p:nvPr/>
+        </p:nvSpPr>
+        <p:spPr>
+          <a:xfrm rot="0">
+            <a:off x="2741394" y="3725787"/>
+            <a:ext cx="12168662" cy="1250950"/>
+          </a:xfrm>
+          <a:prstGeom prst="rect">
+            <a:avLst/>
+          </a:prstGeom>
+        </p:spPr>
+        <p:txBody>
+          <a:bodyPr anchor="t" rtlCol="false" tIns="0" lIns="0" bIns="0" rIns="0">
+            <a:noAutofit/>
+          </a:bodyPr>
+          <a:lstStyle/>
+          <a:p>
+            <a:pPr algn="l" marL="0" indent="0" lvl="0">
+              <a:lnSpc>
+                <a:spcPts val="9799"/>
+              </a:lnSpc>
               <a:spcBef>
-                <a:spcPts val="400"/>
+                <a:spcPct val="0"/>
               </a:spcBef>
-              <a:spcAft>
-                <a:spcPts val="500"/>
-              </a:spcAft>
-              <a:defRPr sz="5500" b="1" i="0">
-                <a:solidFill>
-                  <a:srgbClr val="F3F4F6"/>
-                </a:solidFill>
-                <a:latin typeface="Inter"/>
-              </a:defRPr>
-            </a:pPr>
-            <a:r>
+              <a:defRPr/>
+            </a:pPr>
+            <a:r>
+              <a:rPr lang="en-US" b="1" sz="6900">
+                <a:solidFill>
+                  <a:srgbClr val="FFFFFF"/>
+                </a:solidFill>
+                <a:latin typeface="Poppins Bold"/>
+                <a:ea typeface="Poppins Ultra-Bold"/>
+                <a:cs typeface="Poppins Ultra-Bold"/>
+                <a:sym typeface="Poppins Ultra-Bold"/>
+              </a:rPr>
               <a:t>All: And with your spirit.</a:t>
             </a:r>
           </a:p>
-          <a:p>
-            <a:pPr algn="ctr">
+        </p:txBody>
+      </p:sp>
+      <p:sp>
+        <p:nvSpPr>
+          <p:cNvPr name="TextBox 5" id="5"/>
+          <p:cNvSpPr txBox="true"/>
+          <p:nvPr/>
+        </p:nvSpPr>
+        <p:spPr>
+          <a:xfrm rot="0">
+            <a:off x="2741394" y="7913485"/>
+            <a:ext cx="12002049" cy="1250950"/>
+          </a:xfrm>
+          <a:prstGeom prst="rect">
+            <a:avLst/>
+          </a:prstGeom>
+        </p:spPr>
+        <p:txBody>
+          <a:bodyPr anchor="t" rtlCol="false" tIns="0" lIns="0" bIns="0" rIns="0">
+            <a:noAutofit/>
+          </a:bodyPr>
+          <a:lstStyle/>
+          <a:p>
+            <a:pPr algn="l" marL="0" indent="0" lvl="0">
+              <a:lnSpc>
+                <a:spcPts val="9799"/>
+              </a:lnSpc>
               <a:spcBef>
-                <a:spcPts val="400"/>
+                <a:spcPct val="0"/>
               </a:spcBef>
-              <a:spcAft>
-                <a:spcPts val="500"/>
-              </a:spcAft>
-              <a:defRPr sz="5500" b="1" i="0">
-                <a:solidFill>
-                  <a:srgbClr val="F3F4F6"/>
-                </a:solidFill>
-                <a:latin typeface="Inter"/>
-              </a:defRPr>
-            </a:pPr>
-            <a:r>
-              <a:t>All: Glory to you, O Lord.</a:t>
-            </a:r>
-          </a:p>
-        </p:txBody>
-      </p:sp>
-      <p:sp>
-        <p:nvSpPr>
-          <p:cNvPr id="3" name="TextBox 2"/>
+              <a:defRPr/>
+            </a:pPr>
+            <a:r>
+              <a:rPr lang="en-US" b="1" sz="6900">
+                <a:solidFill>
+                  <a:srgbClr val="FFFFFF"/>
+                </a:solidFill>
+                <a:latin typeface="Poppins Bold"/>
+                <a:ea typeface="Poppins Ultra-Bold"/>
+                <a:cs typeface="Poppins Ultra-Bold"/>
+                <a:sym typeface="Poppins Ultra-Bold"/>
+              </a:rPr>
+              <a:t>All: Glory to you, O Lord!</a:t>
+            </a:r>
+          </a:p>
+        </p:txBody>
+      </p:sp>
+      <p:sp>
+        <p:nvSpPr>
+          <p:cNvPr name="TextBox 6" id="6"/>
+          <p:cNvSpPr txBox="true"/>
+          <p:nvPr/>
+        </p:nvSpPr>
+        <p:spPr>
+          <a:xfrm rot="0">
+            <a:off x="2874744" y="331003"/>
+            <a:ext cx="12538511" cy="1055243"/>
+          </a:xfrm>
+          <a:prstGeom prst="rect">
+            <a:avLst/>
+          </a:prstGeom>
+        </p:spPr>
+        <p:txBody>
+          <a:bodyPr anchor="t" rtlCol="false" tIns="0" lIns="0" bIns="0" rIns="0">
+            <a:noAutofit/>
+          </a:bodyPr>
+          <a:lstStyle/>
+          <a:p>
+            <a:pPr algn="ctr" marL="0" indent="0" lvl="0">
+              <a:lnSpc>
+                <a:spcPts val="8175"/>
+              </a:lnSpc>
+              <a:spcBef>
+                <a:spcPct val="0"/>
+              </a:spcBef>
+              <a:defRPr/>
+            </a:pPr>
+            <a:r>
+              <a:rPr lang="en-US" sz="3850">
+                <a:solidFill>
+                  <a:srgbClr val="FFB800"/>
+                </a:solidFill>
+                <a:latin typeface="Georgia"/>
+                <a:ea typeface="Recoleta"/>
+                <a:cs typeface="Recoleta"/>
+                <a:sym typeface="Recoleta"/>
+              </a:rPr>
+              <a:t>Gospel Acclamation</a:t>
+            </a:r>
+          </a:p>
+        </p:txBody>
+      </p:sp>
+      <p:sp>
+        <p:nvSpPr>
+          <p:cNvPr id="7" name="TextBox 6"/>
           <p:cNvSpPr txBox="1"/>
           <p:nvPr/>
         </p:nvSpPr>
@@ -6680,13 +7104,13 @@
               </a:spcBef>
               <a:defRPr sz="1200" b="0" i="0">
                 <a:solidFill>
-                  <a:srgbClr val="B8A1FF"/>
-                </a:solidFill>
-                <a:latin typeface="Inter"/>
-              </a:defRPr>
-            </a:pPr>
-            <a:r>
-              <a:t>Gospel Acclamation</a:t>
+                  <a:srgbClr val="D8B4FE"/>
+                </a:solidFill>
+                <a:latin typeface="Georgia"/>
+              </a:defRPr>
+            </a:pPr>
+            <a:r>
+              <a:t>Gospel Acclamation (2/2)</a:t>
             </a:r>
           </a:p>
         </p:txBody>
@@ -6705,7 +7129,7 @@
     <p:bg>
       <p:bgPr>
         <a:solidFill>
-          <a:srgbClr val="1F2430"/>
+          <a:srgbClr val="211733"/>
         </a:solidFill>
         <a:effectLst/>
       </p:bgPr>
@@ -6748,9 +7172,9 @@
               </a:spcAft>
               <a:defRPr sz="5500" b="1" i="0">
                 <a:solidFill>
-                  <a:srgbClr val="B8A1FF"/>
-                </a:solidFill>
-                <a:latin typeface="Inter"/>
+                  <a:srgbClr val="D8B4FE"/>
+                </a:solidFill>
+                <a:latin typeface="Georgia"/>
               </a:defRPr>
             </a:pPr>
             <a:r>
@@ -6767,9 +7191,9 @@
               </a:spcAft>
               <a:defRPr sz="5500" b="1" i="0">
                 <a:solidFill>
-                  <a:srgbClr val="F3F4F6"/>
-                </a:solidFill>
-                <a:latin typeface="Inter"/>
+                  <a:srgbClr val="FFFFFF"/>
+                </a:solidFill>
+                <a:latin typeface="Georgia"/>
               </a:defRPr>
             </a:pPr>
             <a:r>
@@ -6807,9 +7231,9 @@
               </a:spcBef>
               <a:defRPr sz="1200" b="0" i="0">
                 <a:solidFill>
-                  <a:srgbClr val="B8A1FF"/>
-                </a:solidFill>
-                <a:latin typeface="Inter"/>
+                  <a:srgbClr val="D8B4FE"/>
+                </a:solidFill>
+                <a:latin typeface="Georgia"/>
               </a:defRPr>
             </a:pPr>
             <a:r>
@@ -6834,10 +7258,10 @@
         <a:gradFill rotWithShape="1">
           <a:gsLst>
             <a:gs pos="0">
-              <a:srgbClr val="0C0D11"/>
+              <a:srgbClr val="0C0B11"/>
             </a:gs>
             <a:gs pos="100000">
-              <a:srgbClr val="5E616A"/>
+              <a:srgbClr val="5F586C"/>
             </a:gs>
           </a:gsLst>
           <a:lin scaled="0" ang="0"/>
@@ -6869,13 +7293,13 @@
             </a:avLst>
           </a:prstGeom>
           <a:solidFill>
-            <a:srgbClr val="1F2430">
+            <a:srgbClr val="211733">
               <a:alpha val="44706"/>
             </a:srgbClr>
           </a:solidFill>
           <a:ln w="14299" cap="sq">
             <a:solidFill>
-              <a:srgbClr val="6B6E76">
+              <a:srgbClr val="6C6678">
                 <a:alpha val="44706"/>
               </a:srgbClr>
             </a:solidFill>
@@ -6920,13 +7344,13 @@
             </a:avLst>
           </a:prstGeom>
           <a:solidFill>
-            <a:srgbClr val="151820">
+            <a:srgbClr val="161122">
               <a:alpha val="60784"/>
             </a:srgbClr>
           </a:solidFill>
           <a:ln w="14299" cap="sq">
             <a:solidFill>
-              <a:srgbClr val="151820">
+              <a:srgbClr val="161122">
                 <a:alpha val="60784"/>
               </a:srgbClr>
             </a:solidFill>
@@ -6982,7 +7406,7 @@
               </a:lnSpc>
               <a:defRPr sz="3700" b="1" i="0">
                 <a:solidFill>
-                  <a:srgbClr val="D6C8FF"/>
+                  <a:srgbClr val="E8D4FE"/>
                 </a:solidFill>
                 <a:latin typeface="Calibri"/>
               </a:defRPr>
@@ -7021,7 +7445,7 @@
               </a:lnSpc>
               <a:defRPr sz="5800" b="1" i="0">
                 <a:solidFill>
-                  <a:srgbClr val="F3F4F6"/>
+                  <a:srgbClr val="FFFFFF"/>
                 </a:solidFill>
                 <a:latin typeface="Calibri"/>
               </a:defRPr>
@@ -7060,7 +7484,7 @@
               </a:lnSpc>
               <a:defRPr sz="4900" b="1" i="1">
                 <a:solidFill>
-                  <a:srgbClr val="F3F4F6"/>
+                  <a:srgbClr val="FFFFFF"/>
                 </a:solidFill>
                 <a:latin typeface="Calibri"/>
               </a:defRPr>
@@ -7099,7 +7523,7 @@
               </a:lnSpc>
               <a:defRPr sz="3200" b="0" i="0">
                 <a:solidFill>
-                  <a:srgbClr val="DED3F4"/>
+                  <a:srgbClr val="FEF5E4"/>
                 </a:solidFill>
                 <a:latin typeface="Calibri"/>
               </a:defRPr>
@@ -7115,7 +7539,7 @@
               </a:lnSpc>
               <a:defRPr sz="3200" b="0" i="0">
                 <a:solidFill>
-                  <a:srgbClr val="DED3F4"/>
+                  <a:srgbClr val="FEF5E4"/>
                 </a:solidFill>
                 <a:latin typeface="Calibri"/>
               </a:defRPr>
@@ -7131,7 +7555,7 @@
               </a:lnSpc>
               <a:defRPr sz="3200" b="0" i="0">
                 <a:solidFill>
-                  <a:srgbClr val="DED3F4"/>
+                  <a:srgbClr val="FEF5E4"/>
                 </a:solidFill>
                 <a:latin typeface="Calibri"/>
               </a:defRPr>
@@ -7170,7 +7594,7 @@
               </a:lnSpc>
               <a:defRPr sz="4100" b="1" i="0">
                 <a:solidFill>
-                  <a:srgbClr val="C1ACFF"/>
+                  <a:srgbClr val="DDBDFE"/>
                 </a:solidFill>
                 <a:latin typeface="Calibri"/>
               </a:defRPr>
@@ -7209,7 +7633,7 @@
               </a:lnSpc>
               <a:defRPr sz="3600" b="1" i="0">
                 <a:solidFill>
-                  <a:srgbClr val="F3F4F6"/>
+                  <a:srgbClr val="FFFFFF"/>
                 </a:solidFill>
                 <a:latin typeface="Calibri"/>
               </a:defRPr>
@@ -7234,7 +7658,7 @@
     <p:bg>
       <p:bgPr>
         <a:solidFill>
-          <a:srgbClr val="1F2430"/>
+          <a:srgbClr val="211733"/>
         </a:solidFill>
         <a:effectLst/>
       </p:bgPr>
@@ -7277,9 +7701,9 @@
               </a:spcAft>
               <a:defRPr sz="5500" b="1" i="0">
                 <a:solidFill>
-                  <a:srgbClr val="F3F4F6"/>
-                </a:solidFill>
-                <a:latin typeface="Inter"/>
+                  <a:srgbClr val="FFFFFF"/>
+                </a:solidFill>
+                <a:latin typeface="Georgia"/>
               </a:defRPr>
             </a:pPr>
             <a:r>
@@ -7293,9 +7717,9 @@
               </a:spcAft>
               <a:defRPr sz="5500" b="0" i="0">
                 <a:solidFill>
-                  <a:srgbClr val="F3F4F6"/>
-                </a:solidFill>
-                <a:latin typeface="Inter"/>
+                  <a:srgbClr val="FFFFFF"/>
+                </a:solidFill>
+                <a:latin typeface="Georgia"/>
               </a:defRPr>
             </a:pPr>
             <a:r>
@@ -7309,9 +7733,9 @@
               </a:spcAft>
               <a:defRPr sz="5500" b="0" i="0">
                 <a:solidFill>
-                  <a:srgbClr val="F3F4F6"/>
-                </a:solidFill>
-                <a:latin typeface="Inter"/>
+                  <a:srgbClr val="FFFFFF"/>
+                </a:solidFill>
+                <a:latin typeface="Georgia"/>
               </a:defRPr>
             </a:pPr>
             <a:r>
@@ -7325,9 +7749,9 @@
               </a:spcAft>
               <a:defRPr sz="5500" b="0" i="0">
                 <a:solidFill>
-                  <a:srgbClr val="F3F4F6"/>
-                </a:solidFill>
-                <a:latin typeface="Inter"/>
+                  <a:srgbClr val="FFFFFF"/>
+                </a:solidFill>
+                <a:latin typeface="Georgia"/>
               </a:defRPr>
             </a:pPr>
             <a:r>
@@ -7365,9 +7789,9 @@
               </a:spcBef>
               <a:defRPr sz="1200" b="0" i="0">
                 <a:solidFill>
-                  <a:srgbClr val="B8A1FF"/>
-                </a:solidFill>
-                <a:latin typeface="Inter"/>
+                  <a:srgbClr val="D8B4FE"/>
+                </a:solidFill>
+                <a:latin typeface="Georgia"/>
               </a:defRPr>
             </a:pPr>
             <a:r>
@@ -7390,7 +7814,7 @@
     <p:bg>
       <p:bgPr>
         <a:solidFill>
-          <a:srgbClr val="1F2430"/>
+          <a:srgbClr val="211733"/>
         </a:solidFill>
         <a:effectLst/>
       </p:bgPr>
@@ -7430,9 +7854,9 @@
               </a:spcAft>
               <a:defRPr sz="5500" b="0" i="0">
                 <a:solidFill>
-                  <a:srgbClr val="F3F4F6"/>
-                </a:solidFill>
-                <a:latin typeface="Inter"/>
+                  <a:srgbClr val="FFFFFF"/>
+                </a:solidFill>
+                <a:latin typeface="Georgia"/>
               </a:defRPr>
             </a:pPr>
             <a:r>
@@ -7446,9 +7870,9 @@
               </a:spcAft>
               <a:defRPr sz="5500" b="0" i="0">
                 <a:solidFill>
-                  <a:srgbClr val="F3F4F6"/>
-                </a:solidFill>
-                <a:latin typeface="Inter"/>
+                  <a:srgbClr val="FFFFFF"/>
+                </a:solidFill>
+                <a:latin typeface="Georgia"/>
               </a:defRPr>
             </a:pPr>
             <a:r>
@@ -7462,9 +7886,9 @@
               </a:spcAft>
               <a:defRPr sz="5500" b="0" i="0">
                 <a:solidFill>
-                  <a:srgbClr val="F3F4F6"/>
-                </a:solidFill>
-                <a:latin typeface="Inter"/>
+                  <a:srgbClr val="FFFFFF"/>
+                </a:solidFill>
+                <a:latin typeface="Georgia"/>
               </a:defRPr>
             </a:pPr>
             <a:r>
@@ -7478,9 +7902,9 @@
               </a:spcAft>
               <a:defRPr sz="5500" b="0" i="0">
                 <a:solidFill>
-                  <a:srgbClr val="F3F4F6"/>
-                </a:solidFill>
-                <a:latin typeface="Inter"/>
+                  <a:srgbClr val="FFFFFF"/>
+                </a:solidFill>
+                <a:latin typeface="Georgia"/>
               </a:defRPr>
             </a:pPr>
             <a:r>
@@ -7518,9 +7942,9 @@
               </a:spcBef>
               <a:defRPr sz="1200" b="0" i="0">
                 <a:solidFill>
-                  <a:srgbClr val="B8A1FF"/>
-                </a:solidFill>
-                <a:latin typeface="Inter"/>
+                  <a:srgbClr val="D8B4FE"/>
+                </a:solidFill>
+                <a:latin typeface="Georgia"/>
               </a:defRPr>
             </a:pPr>
             <a:r>
@@ -7543,7 +7967,7 @@
     <p:bg>
       <p:bgPr>
         <a:solidFill>
-          <a:srgbClr val="1F2430"/>
+          <a:srgbClr val="211733"/>
         </a:solidFill>
         <a:effectLst/>
       </p:bgPr>
@@ -7583,9 +8007,9 @@
               </a:spcAft>
               <a:defRPr sz="5500" b="0" i="0">
                 <a:solidFill>
-                  <a:srgbClr val="F3F4F6"/>
-                </a:solidFill>
-                <a:latin typeface="Inter"/>
+                  <a:srgbClr val="FFFFFF"/>
+                </a:solidFill>
+                <a:latin typeface="Georgia"/>
               </a:defRPr>
             </a:pPr>
             <a:r>
@@ -7599,9 +8023,9 @@
               </a:spcAft>
               <a:defRPr sz="5500" b="0" i="0">
                 <a:solidFill>
-                  <a:srgbClr val="F3F4F6"/>
-                </a:solidFill>
-                <a:latin typeface="Inter"/>
+                  <a:srgbClr val="FFFFFF"/>
+                </a:solidFill>
+                <a:latin typeface="Georgia"/>
               </a:defRPr>
             </a:pPr>
             <a:r>
@@ -7615,9 +8039,9 @@
               </a:spcAft>
               <a:defRPr sz="5500" b="0" i="0">
                 <a:solidFill>
-                  <a:srgbClr val="F3F4F6"/>
-                </a:solidFill>
-                <a:latin typeface="Inter"/>
+                  <a:srgbClr val="FFFFFF"/>
+                </a:solidFill>
+                <a:latin typeface="Georgia"/>
               </a:defRPr>
             </a:pPr>
             <a:r>
@@ -7631,9 +8055,9 @@
               </a:spcAft>
               <a:defRPr sz="5500" b="0" i="0">
                 <a:solidFill>
-                  <a:srgbClr val="F3F4F6"/>
-                </a:solidFill>
-                <a:latin typeface="Inter"/>
+                  <a:srgbClr val="FFFFFF"/>
+                </a:solidFill>
+                <a:latin typeface="Georgia"/>
               </a:defRPr>
             </a:pPr>
             <a:r>
@@ -7671,9 +8095,9 @@
               </a:spcBef>
               <a:defRPr sz="1200" b="0" i="0">
                 <a:solidFill>
-                  <a:srgbClr val="B8A1FF"/>
-                </a:solidFill>
-                <a:latin typeface="Inter"/>
+                  <a:srgbClr val="D8B4FE"/>
+                </a:solidFill>
+                <a:latin typeface="Georgia"/>
               </a:defRPr>
             </a:pPr>
             <a:r>
@@ -7696,7 +8120,7 @@
     <p:bg>
       <p:bgPr>
         <a:solidFill>
-          <a:srgbClr val="1F2430"/>
+          <a:srgbClr val="211733"/>
         </a:solidFill>
         <a:effectLst/>
       </p:bgPr>
@@ -7736,9 +8160,9 @@
               </a:spcAft>
               <a:defRPr sz="5500" b="0" i="0">
                 <a:solidFill>
-                  <a:srgbClr val="F3F4F6"/>
-                </a:solidFill>
-                <a:latin typeface="Inter"/>
+                  <a:srgbClr val="FFFFFF"/>
+                </a:solidFill>
+                <a:latin typeface="Georgia"/>
               </a:defRPr>
             </a:pPr>
             <a:r>
@@ -7752,9 +8176,9 @@
               </a:spcAft>
               <a:defRPr sz="5500" b="0" i="0">
                 <a:solidFill>
-                  <a:srgbClr val="F3F4F6"/>
-                </a:solidFill>
-                <a:latin typeface="Inter"/>
+                  <a:srgbClr val="FFFFFF"/>
+                </a:solidFill>
+                <a:latin typeface="Georgia"/>
               </a:defRPr>
             </a:pPr>
             <a:r>
@@ -7768,9 +8192,9 @@
               </a:spcAft>
               <a:defRPr sz="5500" b="0" i="0">
                 <a:solidFill>
-                  <a:srgbClr val="F3F4F6"/>
-                </a:solidFill>
-                <a:latin typeface="Inter"/>
+                  <a:srgbClr val="FFFFFF"/>
+                </a:solidFill>
+                <a:latin typeface="Georgia"/>
               </a:defRPr>
             </a:pPr>
             <a:r>
@@ -7808,9 +8232,9 @@
               </a:spcBef>
               <a:defRPr sz="1200" b="0" i="0">
                 <a:solidFill>
-                  <a:srgbClr val="B8A1FF"/>
-                </a:solidFill>
-                <a:latin typeface="Inter"/>
+                  <a:srgbClr val="D8B4FE"/>
+                </a:solidFill>
+                <a:latin typeface="Georgia"/>
               </a:defRPr>
             </a:pPr>
             <a:r>
@@ -7910,9 +8334,9 @@
               <a:spcAft>
                 <a:spcPts val="600"/>
               </a:spcAft>
-              <a:defRPr sz="5100" b="1" i="0">
-                <a:solidFill>
-                  <a:srgbClr val="FFFFFF"/>
+              <a:defRPr sz="5100" b="1" i="1">
+                <a:solidFill>
+                  <a:srgbClr val="FFB800"/>
                 </a:solidFill>
                 <a:latin typeface="Poppins Bold"/>
               </a:defRPr>
@@ -7929,9 +8353,9 @@
               <a:spcAft>
                 <a:spcPts val="600"/>
               </a:spcAft>
-              <a:defRPr sz="5100" b="1" i="0">
-                <a:solidFill>
-                  <a:srgbClr val="FFFFFF"/>
+              <a:defRPr sz="5100" b="1" i="1">
+                <a:solidFill>
+                  <a:srgbClr val="FFB800"/>
                 </a:solidFill>
                 <a:latin typeface="Poppins Bold"/>
               </a:defRPr>
@@ -7948,9 +8372,9 @@
               <a:spcAft>
                 <a:spcPts val="600"/>
               </a:spcAft>
-              <a:defRPr sz="5100" b="1" i="0">
-                <a:solidFill>
-                  <a:srgbClr val="FFFFFF"/>
+              <a:defRPr sz="5100" b="1" i="1">
+                <a:solidFill>
+                  <a:srgbClr val="FFB800"/>
                 </a:solidFill>
                 <a:latin typeface="Poppins Bold"/>
               </a:defRPr>
@@ -7967,9 +8391,9 @@
               <a:spcAft>
                 <a:spcPts val="600"/>
               </a:spcAft>
-              <a:defRPr sz="5100" b="1" i="0">
-                <a:solidFill>
-                  <a:srgbClr val="FFFFFF"/>
+              <a:defRPr sz="5100" b="1" i="1">
+                <a:solidFill>
+                  <a:srgbClr val="FFB800"/>
                 </a:solidFill>
                 <a:latin typeface="Poppins Bold"/>
               </a:defRPr>
@@ -8011,7 +8435,7 @@
                 <a:solidFill>
                   <a:srgbClr val="FFCC4D"/>
                 </a:solidFill>
-                <a:latin typeface="Inter"/>
+                <a:latin typeface="Georgia"/>
               </a:defRPr>
             </a:pPr>
             <a:r>
@@ -8034,7 +8458,7 @@
     <p:bg>
       <p:bgPr>
         <a:solidFill>
-          <a:srgbClr val="1F2430"/>
+          <a:srgbClr val="211733"/>
         </a:solidFill>
         <a:effectLst/>
       </p:bgPr>
@@ -8074,9 +8498,9 @@
               </a:spcAft>
               <a:defRPr sz="5500" b="0" i="0">
                 <a:solidFill>
-                  <a:srgbClr val="F3F4F6"/>
-                </a:solidFill>
-                <a:latin typeface="Inter"/>
+                  <a:srgbClr val="FFFFFF"/>
+                </a:solidFill>
+                <a:latin typeface="Georgia"/>
               </a:defRPr>
             </a:pPr>
             <a:r>
@@ -8090,9 +8514,9 @@
               </a:spcAft>
               <a:defRPr sz="5500" b="0" i="0">
                 <a:solidFill>
-                  <a:srgbClr val="F3F4F6"/>
-                </a:solidFill>
-                <a:latin typeface="Inter"/>
+                  <a:srgbClr val="FFFFFF"/>
+                </a:solidFill>
+                <a:latin typeface="Georgia"/>
               </a:defRPr>
             </a:pPr>
             <a:r>
@@ -8106,9 +8530,9 @@
               </a:spcAft>
               <a:defRPr sz="5500" b="0" i="0">
                 <a:solidFill>
-                  <a:srgbClr val="F3F4F6"/>
-                </a:solidFill>
-                <a:latin typeface="Inter"/>
+                  <a:srgbClr val="FFFFFF"/>
+                </a:solidFill>
+                <a:latin typeface="Georgia"/>
               </a:defRPr>
             </a:pPr>
             <a:r>
@@ -8146,9 +8570,9 @@
               </a:spcBef>
               <a:defRPr sz="1200" b="0" i="0">
                 <a:solidFill>
-                  <a:srgbClr val="B8A1FF"/>
-                </a:solidFill>
-                <a:latin typeface="Inter"/>
+                  <a:srgbClr val="D8B4FE"/>
+                </a:solidFill>
+                <a:latin typeface="Georgia"/>
               </a:defRPr>
             </a:pPr>
             <a:r>
@@ -8171,7 +8595,7 @@
     <p:bg>
       <p:bgPr>
         <a:solidFill>
-          <a:srgbClr val="1F2430"/>
+          <a:srgbClr val="211733"/>
         </a:solidFill>
         <a:effectLst/>
       </p:bgPr>
@@ -8211,9 +8635,9 @@
               </a:spcAft>
               <a:defRPr sz="5500" b="0" i="0">
                 <a:solidFill>
-                  <a:srgbClr val="F3F4F6"/>
-                </a:solidFill>
-                <a:latin typeface="Inter"/>
+                  <a:srgbClr val="FFFFFF"/>
+                </a:solidFill>
+                <a:latin typeface="Georgia"/>
               </a:defRPr>
             </a:pPr>
             <a:r>
@@ -8227,9 +8651,9 @@
               </a:spcAft>
               <a:defRPr sz="5500" b="0" i="0">
                 <a:solidFill>
-                  <a:srgbClr val="F3F4F6"/>
-                </a:solidFill>
-                <a:latin typeface="Inter"/>
+                  <a:srgbClr val="FFFFFF"/>
+                </a:solidFill>
+                <a:latin typeface="Georgia"/>
               </a:defRPr>
             </a:pPr>
             <a:r>
@@ -8243,9 +8667,9 @@
               </a:spcAft>
               <a:defRPr sz="5500" b="0" i="0">
                 <a:solidFill>
-                  <a:srgbClr val="F3F4F6"/>
-                </a:solidFill>
-                <a:latin typeface="Inter"/>
+                  <a:srgbClr val="FFFFFF"/>
+                </a:solidFill>
+                <a:latin typeface="Georgia"/>
               </a:defRPr>
             </a:pPr>
             <a:r>
@@ -8259,9 +8683,9 @@
               </a:spcAft>
               <a:defRPr sz="5500" b="0" i="0">
                 <a:solidFill>
-                  <a:srgbClr val="F3F4F6"/>
-                </a:solidFill>
-                <a:latin typeface="Inter"/>
+                  <a:srgbClr val="FFFFFF"/>
+                </a:solidFill>
+                <a:latin typeface="Georgia"/>
               </a:defRPr>
             </a:pPr>
             <a:r>
@@ -8299,9 +8723,9 @@
               </a:spcBef>
               <a:defRPr sz="1200" b="0" i="0">
                 <a:solidFill>
-                  <a:srgbClr val="B8A1FF"/>
-                </a:solidFill>
-                <a:latin typeface="Inter"/>
+                  <a:srgbClr val="D8B4FE"/>
+                </a:solidFill>
+                <a:latin typeface="Georgia"/>
               </a:defRPr>
             </a:pPr>
             <a:r>
@@ -8324,7 +8748,7 @@
     <p:bg>
       <p:bgPr>
         <a:solidFill>
-          <a:srgbClr val="1F2430"/>
+          <a:srgbClr val="211733"/>
         </a:solidFill>
         <a:effectLst/>
       </p:bgPr>
@@ -8364,9 +8788,9 @@
               </a:spcAft>
               <a:defRPr sz="5500" b="0" i="0">
                 <a:solidFill>
-                  <a:srgbClr val="F3F4F6"/>
-                </a:solidFill>
-                <a:latin typeface="Inter"/>
+                  <a:srgbClr val="FFFFFF"/>
+                </a:solidFill>
+                <a:latin typeface="Georgia"/>
               </a:defRPr>
             </a:pPr>
             <a:r>
@@ -8380,9 +8804,9 @@
               </a:spcAft>
               <a:defRPr sz="5500" b="0" i="0">
                 <a:solidFill>
-                  <a:srgbClr val="F3F4F6"/>
-                </a:solidFill>
-                <a:latin typeface="Inter"/>
+                  <a:srgbClr val="FFFFFF"/>
+                </a:solidFill>
+                <a:latin typeface="Georgia"/>
               </a:defRPr>
             </a:pPr>
             <a:r>
@@ -8396,9 +8820,9 @@
               </a:spcAft>
               <a:defRPr sz="5500" b="0" i="0">
                 <a:solidFill>
-                  <a:srgbClr val="F3F4F6"/>
-                </a:solidFill>
-                <a:latin typeface="Inter"/>
+                  <a:srgbClr val="FFFFFF"/>
+                </a:solidFill>
+                <a:latin typeface="Georgia"/>
               </a:defRPr>
             </a:pPr>
             <a:r>
@@ -8436,9 +8860,9 @@
               </a:spcBef>
               <a:defRPr sz="1200" b="0" i="0">
                 <a:solidFill>
-                  <a:srgbClr val="B8A1FF"/>
-                </a:solidFill>
-                <a:latin typeface="Inter"/>
+                  <a:srgbClr val="D8B4FE"/>
+                </a:solidFill>
+                <a:latin typeface="Georgia"/>
               </a:defRPr>
             </a:pPr>
             <a:r>
@@ -8461,7 +8885,7 @@
     <p:bg>
       <p:bgPr>
         <a:solidFill>
-          <a:srgbClr val="1F2430"/>
+          <a:srgbClr val="211733"/>
         </a:solidFill>
         <a:effectLst/>
       </p:bgPr>
@@ -8501,9 +8925,9 @@
               </a:spcAft>
               <a:defRPr sz="5500" b="0" i="0">
                 <a:solidFill>
-                  <a:srgbClr val="F3F4F6"/>
-                </a:solidFill>
-                <a:latin typeface="Inter"/>
+                  <a:srgbClr val="FFFFFF"/>
+                </a:solidFill>
+                <a:latin typeface="Georgia"/>
               </a:defRPr>
             </a:pPr>
             <a:r>
@@ -8517,9 +8941,9 @@
               </a:spcAft>
               <a:defRPr sz="5500" b="0" i="0">
                 <a:solidFill>
-                  <a:srgbClr val="F3F4F6"/>
-                </a:solidFill>
-                <a:latin typeface="Inter"/>
+                  <a:srgbClr val="FFFFFF"/>
+                </a:solidFill>
+                <a:latin typeface="Georgia"/>
               </a:defRPr>
             </a:pPr>
             <a:r>
@@ -8533,9 +8957,9 @@
               </a:spcAft>
               <a:defRPr sz="5500" b="0" i="0">
                 <a:solidFill>
-                  <a:srgbClr val="F3F4F6"/>
-                </a:solidFill>
-                <a:latin typeface="Inter"/>
+                  <a:srgbClr val="FFFFFF"/>
+                </a:solidFill>
+                <a:latin typeface="Georgia"/>
               </a:defRPr>
             </a:pPr>
             <a:r>
@@ -8573,9 +8997,9 @@
               </a:spcBef>
               <a:defRPr sz="1200" b="0" i="0">
                 <a:solidFill>
-                  <a:srgbClr val="B8A1FF"/>
-                </a:solidFill>
-                <a:latin typeface="Inter"/>
+                  <a:srgbClr val="D8B4FE"/>
+                </a:solidFill>
+                <a:latin typeface="Georgia"/>
               </a:defRPr>
             </a:pPr>
             <a:r>
@@ -8598,7 +9022,7 @@
     <p:bg>
       <p:bgPr>
         <a:solidFill>
-          <a:srgbClr val="1F2430"/>
+          <a:srgbClr val="211733"/>
         </a:solidFill>
         <a:effectLst/>
       </p:bgPr>
@@ -8638,9 +9062,9 @@
               </a:spcAft>
               <a:defRPr sz="5500" b="0" i="0">
                 <a:solidFill>
-                  <a:srgbClr val="F3F4F6"/>
-                </a:solidFill>
-                <a:latin typeface="Inter"/>
+                  <a:srgbClr val="FFFFFF"/>
+                </a:solidFill>
+                <a:latin typeface="Georgia"/>
               </a:defRPr>
             </a:pPr>
             <a:r>
@@ -8654,9 +9078,9 @@
               </a:spcAft>
               <a:defRPr sz="5500" b="0" i="0">
                 <a:solidFill>
-                  <a:srgbClr val="F3F4F6"/>
-                </a:solidFill>
-                <a:latin typeface="Inter"/>
+                  <a:srgbClr val="FFFFFF"/>
+                </a:solidFill>
+                <a:latin typeface="Georgia"/>
               </a:defRPr>
             </a:pPr>
             <a:r>
@@ -8694,9 +9118,9 @@
               </a:spcBef>
               <a:defRPr sz="1200" b="0" i="0">
                 <a:solidFill>
-                  <a:srgbClr val="B8A1FF"/>
-                </a:solidFill>
-                <a:latin typeface="Inter"/>
+                  <a:srgbClr val="D8B4FE"/>
+                </a:solidFill>
+                <a:latin typeface="Georgia"/>
               </a:defRPr>
             </a:pPr>
             <a:r>
@@ -8719,7 +9143,7 @@
     <p:bg>
       <p:bgPr>
         <a:solidFill>
-          <a:srgbClr val="1F2430"/>
+          <a:srgbClr val="211733"/>
         </a:solidFill>
         <a:effectLst/>
       </p:bgPr>
@@ -8759,9 +9183,9 @@
               </a:spcAft>
               <a:defRPr sz="5500" b="0" i="0">
                 <a:solidFill>
-                  <a:srgbClr val="F3F4F6"/>
-                </a:solidFill>
-                <a:latin typeface="Inter"/>
+                  <a:srgbClr val="FFFFFF"/>
+                </a:solidFill>
+                <a:latin typeface="Georgia"/>
               </a:defRPr>
             </a:pPr>
             <a:r>
@@ -8775,9 +9199,9 @@
               </a:spcAft>
               <a:defRPr sz="5500" b="0" i="0">
                 <a:solidFill>
-                  <a:srgbClr val="F3F4F6"/>
-                </a:solidFill>
-                <a:latin typeface="Inter"/>
+                  <a:srgbClr val="FFFFFF"/>
+                </a:solidFill>
+                <a:latin typeface="Georgia"/>
               </a:defRPr>
             </a:pPr>
             <a:r>
@@ -8815,9 +9239,9 @@
               </a:spcBef>
               <a:defRPr sz="1200" b="0" i="0">
                 <a:solidFill>
-                  <a:srgbClr val="B8A1FF"/>
-                </a:solidFill>
-                <a:latin typeface="Inter"/>
+                  <a:srgbClr val="D8B4FE"/>
+                </a:solidFill>
+                <a:latin typeface="Georgia"/>
               </a:defRPr>
             </a:pPr>
             <a:r>
@@ -8842,10 +9266,10 @@
         <a:gradFill rotWithShape="1">
           <a:gsLst>
             <a:gs pos="0">
-              <a:srgbClr val="0C0D11"/>
+              <a:srgbClr val="0C0B11"/>
             </a:gs>
             <a:gs pos="100000">
-              <a:srgbClr val="5E616A"/>
+              <a:srgbClr val="5F586C"/>
             </a:gs>
           </a:gsLst>
           <a:lin scaled="0" ang="0"/>
@@ -8877,13 +9301,13 @@
             </a:avLst>
           </a:prstGeom>
           <a:solidFill>
-            <a:srgbClr val="1F2430">
+            <a:srgbClr val="211733">
               <a:alpha val="44706"/>
             </a:srgbClr>
           </a:solidFill>
           <a:ln w="14299" cap="sq">
             <a:solidFill>
-              <a:srgbClr val="6B6E76">
+              <a:srgbClr val="6C6678">
                 <a:alpha val="44706"/>
               </a:srgbClr>
             </a:solidFill>
@@ -8928,13 +9352,13 @@
             </a:avLst>
           </a:prstGeom>
           <a:solidFill>
-            <a:srgbClr val="151820">
+            <a:srgbClr val="161122">
               <a:alpha val="60784"/>
             </a:srgbClr>
           </a:solidFill>
           <a:ln w="14299" cap="sq">
             <a:solidFill>
-              <a:srgbClr val="151820">
+              <a:srgbClr val="161122">
                 <a:alpha val="60784"/>
               </a:srgbClr>
             </a:solidFill>
@@ -8990,7 +9414,7 @@
               </a:lnSpc>
               <a:defRPr sz="3700" b="1" i="0">
                 <a:solidFill>
-                  <a:srgbClr val="D6C8FF"/>
+                  <a:srgbClr val="E8D4FE"/>
                 </a:solidFill>
                 <a:latin typeface="Calibri"/>
               </a:defRPr>
@@ -9029,7 +9453,7 @@
               </a:lnSpc>
               <a:defRPr sz="5800" b="1" i="0">
                 <a:solidFill>
-                  <a:srgbClr val="F3F4F6"/>
+                  <a:srgbClr val="FFFFFF"/>
                 </a:solidFill>
                 <a:latin typeface="Calibri"/>
               </a:defRPr>
@@ -9068,7 +9492,7 @@
               </a:lnSpc>
               <a:defRPr sz="4900" b="1" i="1">
                 <a:solidFill>
-                  <a:srgbClr val="F3F4F6"/>
+                  <a:srgbClr val="FFFFFF"/>
                 </a:solidFill>
                 <a:latin typeface="Calibri"/>
               </a:defRPr>
@@ -9107,7 +9531,7 @@
               </a:lnSpc>
               <a:defRPr sz="3200" b="0" i="0">
                 <a:solidFill>
-                  <a:srgbClr val="DED3F4"/>
+                  <a:srgbClr val="FEF5E4"/>
                 </a:solidFill>
                 <a:latin typeface="Calibri"/>
               </a:defRPr>
@@ -9123,7 +9547,7 @@
               </a:lnSpc>
               <a:defRPr sz="3200" b="0" i="0">
                 <a:solidFill>
-                  <a:srgbClr val="DED3F4"/>
+                  <a:srgbClr val="FEF5E4"/>
                 </a:solidFill>
                 <a:latin typeface="Calibri"/>
               </a:defRPr>
@@ -9139,7 +9563,7 @@
               </a:lnSpc>
               <a:defRPr sz="3200" b="0" i="0">
                 <a:solidFill>
-                  <a:srgbClr val="DED3F4"/>
+                  <a:srgbClr val="FEF5E4"/>
                 </a:solidFill>
                 <a:latin typeface="Calibri"/>
               </a:defRPr>
@@ -9178,7 +9602,7 @@
               </a:lnSpc>
               <a:defRPr sz="4100" b="1" i="0">
                 <a:solidFill>
-                  <a:srgbClr val="C1ACFF"/>
+                  <a:srgbClr val="DDBDFE"/>
                 </a:solidFill>
                 <a:latin typeface="Calibri"/>
               </a:defRPr>
@@ -9217,7 +9641,7 @@
               </a:lnSpc>
               <a:defRPr sz="3600" b="1" i="0">
                 <a:solidFill>
-                  <a:srgbClr val="F3F4F6"/>
+                  <a:srgbClr val="FFFFFF"/>
                 </a:solidFill>
                 <a:latin typeface="Calibri"/>
               </a:defRPr>
@@ -9242,7 +9666,7 @@
     <p:bg>
       <p:bgPr>
         <a:solidFill>
-          <a:srgbClr val="1F2430"/>
+          <a:srgbClr val="211733"/>
         </a:solidFill>
         <a:effectLst/>
       </p:bgPr>
@@ -9285,9 +9709,9 @@
               </a:spcAft>
               <a:defRPr sz="5500" b="1" i="0">
                 <a:solidFill>
-                  <a:srgbClr val="B8A1FF"/>
-                </a:solidFill>
-                <a:latin typeface="Inter"/>
+                  <a:srgbClr val="D8B4FE"/>
+                </a:solidFill>
+                <a:latin typeface="Georgia"/>
               </a:defRPr>
             </a:pPr>
             <a:r>
@@ -9304,9 +9728,9 @@
               </a:spcAft>
               <a:defRPr sz="5500" b="1" i="0">
                 <a:solidFill>
-                  <a:srgbClr val="F3F4F6"/>
-                </a:solidFill>
-                <a:latin typeface="Inter"/>
+                  <a:srgbClr val="FFFFFF"/>
+                </a:solidFill>
+                <a:latin typeface="Georgia"/>
               </a:defRPr>
             </a:pPr>
             <a:r>
@@ -9344,9 +9768,9 @@
               </a:spcBef>
               <a:defRPr sz="1200" b="0" i="0">
                 <a:solidFill>
-                  <a:srgbClr val="B8A1FF"/>
-                </a:solidFill>
-                <a:latin typeface="Inter"/>
+                  <a:srgbClr val="D8B4FE"/>
+                </a:solidFill>
+                <a:latin typeface="Georgia"/>
               </a:defRPr>
             </a:pPr>
             <a:r>
@@ -9369,7 +9793,7 @@
     <p:bg>
       <p:bgPr>
         <a:solidFill>
-          <a:srgbClr val="1F2430"/>
+          <a:srgbClr val="211733"/>
         </a:solidFill>
         <a:effectLst/>
       </p:bgPr>
@@ -9412,9 +9836,9 @@
               </a:spcAft>
               <a:defRPr sz="5500" b="1" i="0">
                 <a:solidFill>
-                  <a:srgbClr val="B8A1FF"/>
-                </a:solidFill>
-                <a:latin typeface="Inter"/>
+                  <a:srgbClr val="D8B4FE"/>
+                </a:solidFill>
+                <a:latin typeface="Georgia"/>
               </a:defRPr>
             </a:pPr>
             <a:r>
@@ -9431,9 +9855,9 @@
               </a:spcAft>
               <a:defRPr sz="5500" b="1" i="0">
                 <a:solidFill>
-                  <a:srgbClr val="B8A1FF"/>
-                </a:solidFill>
-                <a:latin typeface="Inter"/>
+                  <a:srgbClr val="D8B4FE"/>
+                </a:solidFill>
+                <a:latin typeface="Georgia"/>
               </a:defRPr>
             </a:pPr>
             <a:r>
@@ -9450,9 +9874,9 @@
               </a:spcAft>
               <a:defRPr sz="5500" b="1" i="0">
                 <a:solidFill>
-                  <a:srgbClr val="F3F4F6"/>
-                </a:solidFill>
-                <a:latin typeface="Inter"/>
+                  <a:srgbClr val="FFFFFF"/>
+                </a:solidFill>
+                <a:latin typeface="Georgia"/>
               </a:defRPr>
             </a:pPr>
             <a:r>
@@ -9490,9 +9914,9 @@
               </a:spcBef>
               <a:defRPr sz="1200" b="0" i="0">
                 <a:solidFill>
-                  <a:srgbClr val="B8A1FF"/>
-                </a:solidFill>
-                <a:latin typeface="Inter"/>
+                  <a:srgbClr val="D8B4FE"/>
+                </a:solidFill>
+                <a:latin typeface="Georgia"/>
               </a:defRPr>
             </a:pPr>
             <a:r>
@@ -9517,10 +9941,10 @@
         <a:gradFill rotWithShape="1">
           <a:gsLst>
             <a:gs pos="0">
-              <a:srgbClr val="0C0D11"/>
+              <a:srgbClr val="0C0B11"/>
             </a:gs>
             <a:gs pos="100000">
-              <a:srgbClr val="5E616A"/>
+              <a:srgbClr val="5F586C"/>
             </a:gs>
           </a:gsLst>
           <a:lin scaled="0" ang="0"/>
@@ -9552,13 +9976,13 @@
             </a:avLst>
           </a:prstGeom>
           <a:solidFill>
-            <a:srgbClr val="1F2430">
+            <a:srgbClr val="211733">
               <a:alpha val="44706"/>
             </a:srgbClr>
           </a:solidFill>
           <a:ln w="14299" cap="sq">
             <a:solidFill>
-              <a:srgbClr val="6B6E76">
+              <a:srgbClr val="6C6678">
                 <a:alpha val="44706"/>
               </a:srgbClr>
             </a:solidFill>
@@ -9603,13 +10027,13 @@
             </a:avLst>
           </a:prstGeom>
           <a:solidFill>
-            <a:srgbClr val="151820">
+            <a:srgbClr val="161122">
               <a:alpha val="60784"/>
             </a:srgbClr>
           </a:solidFill>
           <a:ln w="14299" cap="sq">
             <a:solidFill>
-              <a:srgbClr val="151820">
+              <a:srgbClr val="161122">
                 <a:alpha val="60784"/>
               </a:srgbClr>
             </a:solidFill>
@@ -9665,7 +10089,7 @@
               </a:lnSpc>
               <a:defRPr sz="3700" b="1" i="0">
                 <a:solidFill>
-                  <a:srgbClr val="D6C8FF"/>
+                  <a:srgbClr val="E8D4FE"/>
                 </a:solidFill>
                 <a:latin typeface="Calibri"/>
               </a:defRPr>
@@ -9704,7 +10128,7 @@
               </a:lnSpc>
               <a:defRPr sz="5800" b="1" i="0">
                 <a:solidFill>
-                  <a:srgbClr val="F3F4F6"/>
+                  <a:srgbClr val="FFFFFF"/>
                 </a:solidFill>
                 <a:latin typeface="Calibri"/>
               </a:defRPr>
@@ -9743,7 +10167,7 @@
               </a:lnSpc>
               <a:defRPr sz="4900" b="1" i="1">
                 <a:solidFill>
-                  <a:srgbClr val="F3F4F6"/>
+                  <a:srgbClr val="FFFFFF"/>
                 </a:solidFill>
                 <a:latin typeface="Calibri"/>
               </a:defRPr>
@@ -9782,7 +10206,7 @@
               </a:lnSpc>
               <a:defRPr sz="3200" b="0" i="0">
                 <a:solidFill>
-                  <a:srgbClr val="DED3F4"/>
+                  <a:srgbClr val="FEF5E4"/>
                 </a:solidFill>
                 <a:latin typeface="Calibri"/>
               </a:defRPr>
@@ -9798,7 +10222,7 @@
               </a:lnSpc>
               <a:defRPr sz="3200" b="0" i="0">
                 <a:solidFill>
-                  <a:srgbClr val="DED3F4"/>
+                  <a:srgbClr val="FEF5E4"/>
                 </a:solidFill>
                 <a:latin typeface="Calibri"/>
               </a:defRPr>
@@ -9814,7 +10238,7 @@
               </a:lnSpc>
               <a:defRPr sz="3200" b="0" i="0">
                 <a:solidFill>
-                  <a:srgbClr val="DED3F4"/>
+                  <a:srgbClr val="FEF5E4"/>
                 </a:solidFill>
                 <a:latin typeface="Calibri"/>
               </a:defRPr>
@@ -9853,7 +10277,7 @@
               </a:lnSpc>
               <a:defRPr sz="4100" b="1" i="0">
                 <a:solidFill>
-                  <a:srgbClr val="C1ACFF"/>
+                  <a:srgbClr val="DDBDFE"/>
                 </a:solidFill>
                 <a:latin typeface="Calibri"/>
               </a:defRPr>
@@ -9892,7 +10316,7 @@
               </a:lnSpc>
               <a:defRPr sz="3600" b="1" i="0">
                 <a:solidFill>
-                  <a:srgbClr val="F3F4F6"/>
+                  <a:srgbClr val="FFFFFF"/>
                 </a:solidFill>
                 <a:latin typeface="Calibri"/>
               </a:defRPr>
@@ -10059,7 +10483,7 @@
                 <a:solidFill>
                   <a:srgbClr val="FFCC4D"/>
                 </a:solidFill>
-                <a:latin typeface="Inter"/>
+                <a:latin typeface="Georgia"/>
               </a:defRPr>
             </a:pPr>
             <a:r>
@@ -10260,7 +10684,7 @@
                 <a:solidFill>
                   <a:srgbClr val="FFCC4D"/>
                 </a:solidFill>
-                <a:latin typeface="Inter"/>
+                <a:latin typeface="Georgia"/>
               </a:defRPr>
             </a:pPr>
             <a:r>
@@ -10425,7 +10849,7 @@
                 <a:solidFill>
                   <a:srgbClr val="FFCC4D"/>
                 </a:solidFill>
-                <a:latin typeface="Inter"/>
+                <a:latin typeface="Georgia"/>
               </a:defRPr>
             </a:pPr>
             <a:r>
@@ -10590,7 +11014,7 @@
                 <a:solidFill>
                   <a:srgbClr val="FFCC4D"/>
                 </a:solidFill>
-                <a:latin typeface="Inter"/>
+                <a:latin typeface="Georgia"/>
               </a:defRPr>
             </a:pPr>
             <a:r>
@@ -10755,7 +11179,7 @@
                 <a:solidFill>
                   <a:srgbClr val="FFCC4D"/>
                 </a:solidFill>
-                <a:latin typeface="Inter"/>
+                <a:latin typeface="Georgia"/>
               </a:defRPr>
             </a:pPr>
             <a:r>
@@ -10778,7 +11202,7 @@
     <p:bg>
       <p:bgPr>
         <a:solidFill>
-          <a:srgbClr val="1F2430"/>
+          <a:srgbClr val="211733"/>
         </a:solidFill>
         <a:effectLst/>
       </p:bgPr>
@@ -10815,9 +11239,9 @@
             <a:pPr algn="ctr">
               <a:defRPr sz="5500" b="1" i="0">
                 <a:solidFill>
-                  <a:srgbClr val="B8A1FF"/>
-                </a:solidFill>
-                <a:latin typeface="Inter"/>
+                  <a:srgbClr val="D8B4FE"/>
+                </a:solidFill>
+                <a:latin typeface="Georgia"/>
               </a:defRPr>
             </a:pPr>
             <a:r>
@@ -10859,9 +11283,9 @@
               </a:spcBef>
               <a:defRPr sz="1200" b="0" i="0">
                 <a:solidFill>
-                  <a:srgbClr val="B8A1FF"/>
-                </a:solidFill>
-                <a:latin typeface="Inter"/>
+                  <a:srgbClr val="D8B4FE"/>
+                </a:solidFill>
+                <a:latin typeface="Georgia"/>
               </a:defRPr>
             </a:pPr>
             <a:r>
@@ -10884,7 +11308,7 @@
     <p:bg>
       <p:bgPr>
         <a:solidFill>
-          <a:srgbClr val="1F2430"/>
+          <a:srgbClr val="211733"/>
         </a:solidFill>
         <a:effectLst/>
       </p:bgPr>
@@ -10927,9 +11351,9 @@
               </a:spcAft>
               <a:defRPr sz="5500" b="1" i="0">
                 <a:solidFill>
-                  <a:srgbClr val="B8A1FF"/>
-                </a:solidFill>
-                <a:latin typeface="Inter"/>
+                  <a:srgbClr val="D8B4FE"/>
+                </a:solidFill>
+                <a:latin typeface="Georgia"/>
               </a:defRPr>
             </a:pPr>
             <a:r>
@@ -10946,9 +11370,9 @@
               </a:spcAft>
               <a:defRPr sz="5500" b="1" i="0">
                 <a:solidFill>
-                  <a:srgbClr val="F3F4F6"/>
-                </a:solidFill>
-                <a:latin typeface="Inter"/>
+                  <a:srgbClr val="FFFFFF"/>
+                </a:solidFill>
+                <a:latin typeface="Georgia"/>
               </a:defRPr>
             </a:pPr>
             <a:r>
@@ -10986,9 +11410,9 @@
               </a:spcBef>
               <a:defRPr sz="1200" b="0" i="0">
                 <a:solidFill>
-                  <a:srgbClr val="B8A1FF"/>
-                </a:solidFill>
-                <a:latin typeface="Inter"/>
+                  <a:srgbClr val="D8B4FE"/>
+                </a:solidFill>
+                <a:latin typeface="Georgia"/>
               </a:defRPr>
             </a:pPr>
             <a:r>
@@ -11011,7 +11435,7 @@
     <p:bg>
       <p:bgPr>
         <a:solidFill>
-          <a:srgbClr val="1F2430"/>
+          <a:srgbClr val="211733"/>
         </a:solidFill>
         <a:effectLst/>
       </p:bgPr>
@@ -11048,9 +11472,9 @@
             <a:pPr algn="ctr">
               <a:defRPr sz="5500" b="1" i="0">
                 <a:solidFill>
-                  <a:srgbClr val="B8A1FF"/>
-                </a:solidFill>
-                <a:latin typeface="Inter"/>
+                  <a:srgbClr val="D8B4FE"/>
+                </a:solidFill>
+                <a:latin typeface="Georgia"/>
               </a:defRPr>
             </a:pPr>
             <a:r>
@@ -11092,9 +11516,9 @@
               </a:spcBef>
               <a:defRPr sz="1200" b="0" i="0">
                 <a:solidFill>
-                  <a:srgbClr val="B8A1FF"/>
-                </a:solidFill>
-                <a:latin typeface="Inter"/>
+                  <a:srgbClr val="D8B4FE"/>
+                </a:solidFill>
+                <a:latin typeface="Georgia"/>
               </a:defRPr>
             </a:pPr>
             <a:r>
@@ -11117,7 +11541,7 @@
     <p:bg>
       <p:bgPr>
         <a:solidFill>
-          <a:srgbClr val="1F2430"/>
+          <a:srgbClr val="211733"/>
         </a:solidFill>
         <a:effectLst/>
       </p:bgPr>
@@ -11160,9 +11584,9 @@
               </a:spcAft>
               <a:defRPr sz="5500" b="1" i="0">
                 <a:solidFill>
-                  <a:srgbClr val="B8A1FF"/>
-                </a:solidFill>
-                <a:latin typeface="Inter"/>
+                  <a:srgbClr val="D8B4FE"/>
+                </a:solidFill>
+                <a:latin typeface="Georgia"/>
               </a:defRPr>
             </a:pPr>
             <a:r>
@@ -11179,9 +11603,9 @@
               </a:spcAft>
               <a:defRPr sz="5500" b="1" i="0">
                 <a:solidFill>
-                  <a:srgbClr val="F3F4F6"/>
-                </a:solidFill>
-                <a:latin typeface="Inter"/>
+                  <a:srgbClr val="FFFFFF"/>
+                </a:solidFill>
+                <a:latin typeface="Georgia"/>
               </a:defRPr>
             </a:pPr>
             <a:r>
@@ -11198,9 +11622,9 @@
               </a:spcAft>
               <a:defRPr sz="5500" b="1" i="0">
                 <a:solidFill>
-                  <a:srgbClr val="B8A1FF"/>
-                </a:solidFill>
-                <a:latin typeface="Inter"/>
+                  <a:srgbClr val="D8B4FE"/>
+                </a:solidFill>
+                <a:latin typeface="Georgia"/>
               </a:defRPr>
             </a:pPr>
             <a:r>
@@ -11217,9 +11641,9 @@
               </a:spcAft>
               <a:defRPr sz="5500" b="1" i="0">
                 <a:solidFill>
-                  <a:srgbClr val="F3F4F6"/>
-                </a:solidFill>
-                <a:latin typeface="Inter"/>
+                  <a:srgbClr val="FFFFFF"/>
+                </a:solidFill>
+                <a:latin typeface="Georgia"/>
               </a:defRPr>
             </a:pPr>
             <a:r>
@@ -11236,9 +11660,9 @@
               </a:spcAft>
               <a:defRPr sz="5500" b="1" i="0">
                 <a:solidFill>
-                  <a:srgbClr val="B8A1FF"/>
-                </a:solidFill>
-                <a:latin typeface="Inter"/>
+                  <a:srgbClr val="D8B4FE"/>
+                </a:solidFill>
+                <a:latin typeface="Georgia"/>
               </a:defRPr>
             </a:pPr>
             <a:r>
@@ -11255,9 +11679,9 @@
               </a:spcAft>
               <a:defRPr sz="5500" b="1" i="0">
                 <a:solidFill>
-                  <a:srgbClr val="F3F4F6"/>
-                </a:solidFill>
-                <a:latin typeface="Inter"/>
+                  <a:srgbClr val="FFFFFF"/>
+                </a:solidFill>
+                <a:latin typeface="Georgia"/>
               </a:defRPr>
             </a:pPr>
             <a:r>
@@ -11295,9 +11719,9 @@
               </a:spcBef>
               <a:defRPr sz="1200" b="0" i="0">
                 <a:solidFill>
-                  <a:srgbClr val="B8A1FF"/>
-                </a:solidFill>
-                <a:latin typeface="Inter"/>
+                  <a:srgbClr val="D8B4FE"/>
+                </a:solidFill>
+                <a:latin typeface="Georgia"/>
               </a:defRPr>
             </a:pPr>
             <a:r>
@@ -11320,7 +11744,7 @@
     <p:bg>
       <p:bgPr>
         <a:solidFill>
-          <a:srgbClr val="1F2430"/>
+          <a:srgbClr val="211733"/>
         </a:solidFill>
         <a:effectLst/>
       </p:bgPr>
@@ -11363,9 +11787,9 @@
               </a:spcAft>
               <a:defRPr sz="5500" b="1" i="0">
                 <a:solidFill>
-                  <a:srgbClr val="F3F4F6"/>
-                </a:solidFill>
-                <a:latin typeface="Inter"/>
+                  <a:srgbClr val="FFFFFF"/>
+                </a:solidFill>
+                <a:latin typeface="Georgia"/>
               </a:defRPr>
             </a:pPr>
             <a:r>
@@ -11379,9 +11803,9 @@
               </a:spcAft>
               <a:defRPr sz="5500" b="0" i="0">
                 <a:solidFill>
-                  <a:srgbClr val="F3F4F6"/>
-                </a:solidFill>
-                <a:latin typeface="Inter"/>
+                  <a:srgbClr val="FFFFFF"/>
+                </a:solidFill>
+                <a:latin typeface="Georgia"/>
               </a:defRPr>
             </a:pPr>
             <a:r>
@@ -11395,9 +11819,9 @@
               </a:spcAft>
               <a:defRPr sz="5500" b="0" i="0">
                 <a:solidFill>
-                  <a:srgbClr val="F3F4F6"/>
-                </a:solidFill>
-                <a:latin typeface="Inter"/>
+                  <a:srgbClr val="FFFFFF"/>
+                </a:solidFill>
+                <a:latin typeface="Georgia"/>
               </a:defRPr>
             </a:pPr>
             <a:r>
@@ -11411,9 +11835,9 @@
               </a:spcAft>
               <a:defRPr sz="5500" b="0" i="0">
                 <a:solidFill>
-                  <a:srgbClr val="F3F4F6"/>
-                </a:solidFill>
-                <a:latin typeface="Inter"/>
+                  <a:srgbClr val="FFFFFF"/>
+                </a:solidFill>
+                <a:latin typeface="Georgia"/>
               </a:defRPr>
             </a:pPr>
             <a:r>
@@ -11427,9 +11851,9 @@
               </a:spcAft>
               <a:defRPr sz="5500" b="0" i="0">
                 <a:solidFill>
-                  <a:srgbClr val="F3F4F6"/>
-                </a:solidFill>
-                <a:latin typeface="Inter"/>
+                  <a:srgbClr val="FFFFFF"/>
+                </a:solidFill>
+                <a:latin typeface="Georgia"/>
               </a:defRPr>
             </a:pPr>
             <a:r>
@@ -11467,9 +11891,9 @@
               </a:spcBef>
               <a:defRPr sz="1200" b="0" i="0">
                 <a:solidFill>
-                  <a:srgbClr val="B8A1FF"/>
-                </a:solidFill>
-                <a:latin typeface="Inter"/>
+                  <a:srgbClr val="D8B4FE"/>
+                </a:solidFill>
+                <a:latin typeface="Georgia"/>
               </a:defRPr>
             </a:pPr>
             <a:r>
@@ -11492,7 +11916,7 @@
     <p:bg>
       <p:bgPr>
         <a:solidFill>
-          <a:srgbClr val="1F2430"/>
+          <a:srgbClr val="211733"/>
         </a:solidFill>
         <a:effectLst/>
       </p:bgPr>
@@ -11529,9 +11953,9 @@
             <a:pPr algn="ctr">
               <a:defRPr sz="5500" b="1" i="0">
                 <a:solidFill>
-                  <a:srgbClr val="B8A1FF"/>
-                </a:solidFill>
-                <a:latin typeface="Inter"/>
+                  <a:srgbClr val="D8B4FE"/>
+                </a:solidFill>
+                <a:latin typeface="Georgia"/>
               </a:defRPr>
             </a:pPr>
             <a:r>
@@ -11573,9 +11997,9 @@
               </a:spcBef>
               <a:defRPr sz="1200" b="0" i="0">
                 <a:solidFill>
-                  <a:srgbClr val="B8A1FF"/>
-                </a:solidFill>
-                <a:latin typeface="Inter"/>
+                  <a:srgbClr val="D8B4FE"/>
+                </a:solidFill>
+                <a:latin typeface="Georgia"/>
               </a:defRPr>
             </a:pPr>
             <a:r>
@@ -11639,9 +12063,9 @@
               <a:spcAft>
                 <a:spcPts val="600"/>
               </a:spcAft>
-              <a:defRPr sz="5100" b="1" i="0">
-                <a:solidFill>
-                  <a:srgbClr val="FFFFFF"/>
+              <a:defRPr sz="5100" b="1" i="1">
+                <a:solidFill>
+                  <a:srgbClr val="FFB800"/>
                 </a:solidFill>
                 <a:latin typeface="Poppins Bold"/>
               </a:defRPr>
@@ -11658,9 +12082,9 @@
               <a:spcAft>
                 <a:spcPts val="600"/>
               </a:spcAft>
-              <a:defRPr sz="5100" b="1" i="0">
-                <a:solidFill>
-                  <a:srgbClr val="FFFFFF"/>
+              <a:defRPr sz="5100" b="1" i="1">
+                <a:solidFill>
+                  <a:srgbClr val="FFB800"/>
                 </a:solidFill>
                 <a:latin typeface="Poppins Bold"/>
               </a:defRPr>
@@ -11677,9 +12101,9 @@
               <a:spcAft>
                 <a:spcPts val="600"/>
               </a:spcAft>
-              <a:defRPr sz="5100" b="1" i="0">
-                <a:solidFill>
-                  <a:srgbClr val="FFFFFF"/>
+              <a:defRPr sz="5100" b="1" i="1">
+                <a:solidFill>
+                  <a:srgbClr val="FFB800"/>
                 </a:solidFill>
                 <a:latin typeface="Poppins Bold"/>
               </a:defRPr>
@@ -11696,9 +12120,9 @@
               <a:spcAft>
                 <a:spcPts val="600"/>
               </a:spcAft>
-              <a:defRPr sz="5100" b="1" i="0">
-                <a:solidFill>
-                  <a:srgbClr val="FFFFFF"/>
+              <a:defRPr sz="5100" b="1" i="1">
+                <a:solidFill>
+                  <a:srgbClr val="FFB800"/>
                 </a:solidFill>
                 <a:latin typeface="Poppins Bold"/>
               </a:defRPr>
@@ -11740,7 +12164,7 @@
                 <a:solidFill>
                   <a:srgbClr val="FFCC4D"/>
                 </a:solidFill>
-                <a:latin typeface="Inter"/>
+                <a:latin typeface="Georgia"/>
               </a:defRPr>
             </a:pPr>
             <a:r>
@@ -11763,7 +12187,7 @@
     <p:bg>
       <p:bgPr>
         <a:solidFill>
-          <a:srgbClr val="1F2430"/>
+          <a:srgbClr val="211733"/>
         </a:solidFill>
         <a:effectLst/>
       </p:bgPr>
@@ -11806,9 +12230,9 @@
               </a:spcAft>
               <a:defRPr sz="5500" b="1" i="0">
                 <a:solidFill>
-                  <a:srgbClr val="F3F4F6"/>
-                </a:solidFill>
-                <a:latin typeface="Inter"/>
+                  <a:srgbClr val="FFFFFF"/>
+                </a:solidFill>
+                <a:latin typeface="Georgia"/>
               </a:defRPr>
             </a:pPr>
             <a:r>
@@ -11822,9 +12246,9 @@
               </a:spcAft>
               <a:defRPr sz="5500" b="0" i="0">
                 <a:solidFill>
-                  <a:srgbClr val="F3F4F6"/>
-                </a:solidFill>
-                <a:latin typeface="Inter"/>
+                  <a:srgbClr val="FFFFFF"/>
+                </a:solidFill>
+                <a:latin typeface="Georgia"/>
               </a:defRPr>
             </a:pPr>
             <a:r>
@@ -11838,9 +12262,9 @@
               </a:spcAft>
               <a:defRPr sz="5500" b="0" i="0">
                 <a:solidFill>
-                  <a:srgbClr val="F3F4F6"/>
-                </a:solidFill>
-                <a:latin typeface="Inter"/>
+                  <a:srgbClr val="FFFFFF"/>
+                </a:solidFill>
+                <a:latin typeface="Georgia"/>
               </a:defRPr>
             </a:pPr>
             <a:r>
@@ -11878,9 +12302,9 @@
               </a:spcBef>
               <a:defRPr sz="1200" b="0" i="0">
                 <a:solidFill>
-                  <a:srgbClr val="B8A1FF"/>
-                </a:solidFill>
-                <a:latin typeface="Inter"/>
+                  <a:srgbClr val="D8B4FE"/>
+                </a:solidFill>
+                <a:latin typeface="Georgia"/>
               </a:defRPr>
             </a:pPr>
             <a:r>
@@ -11903,7 +12327,7 @@
     <p:bg>
       <p:bgPr>
         <a:solidFill>
-          <a:srgbClr val="1F2430"/>
+          <a:srgbClr val="211733"/>
         </a:solidFill>
         <a:effectLst/>
       </p:bgPr>
@@ -11940,9 +12364,9 @@
             <a:pPr algn="ctr">
               <a:defRPr sz="5500" b="1" i="0">
                 <a:solidFill>
-                  <a:srgbClr val="B8A1FF"/>
-                </a:solidFill>
-                <a:latin typeface="Inter"/>
+                  <a:srgbClr val="D8B4FE"/>
+                </a:solidFill>
+                <a:latin typeface="Georgia"/>
               </a:defRPr>
             </a:pPr>
             <a:r>
@@ -11984,9 +12408,9 @@
               </a:spcBef>
               <a:defRPr sz="1200" b="0" i="0">
                 <a:solidFill>
-                  <a:srgbClr val="B8A1FF"/>
-                </a:solidFill>
-                <a:latin typeface="Inter"/>
+                  <a:srgbClr val="D8B4FE"/>
+                </a:solidFill>
+                <a:latin typeface="Georgia"/>
               </a:defRPr>
             </a:pPr>
             <a:r>
@@ -12009,7 +12433,7 @@
     <p:bg>
       <p:bgPr>
         <a:solidFill>
-          <a:srgbClr val="1F2430"/>
+          <a:srgbClr val="211733"/>
         </a:solidFill>
         <a:effectLst/>
       </p:bgPr>
@@ -12052,9 +12476,9 @@
               </a:spcAft>
               <a:defRPr sz="5500" b="1" i="0">
                 <a:solidFill>
-                  <a:srgbClr val="F3F4F6"/>
-                </a:solidFill>
-                <a:latin typeface="Inter"/>
+                  <a:srgbClr val="FFFFFF"/>
+                </a:solidFill>
+                <a:latin typeface="Georgia"/>
               </a:defRPr>
             </a:pPr>
             <a:r>
@@ -12092,9 +12516,9 @@
               </a:spcBef>
               <a:defRPr sz="1200" b="0" i="0">
                 <a:solidFill>
-                  <a:srgbClr val="B8A1FF"/>
-                </a:solidFill>
-                <a:latin typeface="Inter"/>
+                  <a:srgbClr val="D8B4FE"/>
+                </a:solidFill>
+                <a:latin typeface="Georgia"/>
               </a:defRPr>
             </a:pPr>
             <a:r>
@@ -12117,7 +12541,7 @@
     <p:bg>
       <p:bgPr>
         <a:solidFill>
-          <a:srgbClr val="1F2430"/>
+          <a:srgbClr val="211733"/>
         </a:solidFill>
         <a:effectLst/>
       </p:bgPr>
@@ -12160,9 +12584,9 @@
               </a:spcAft>
               <a:defRPr sz="5500" b="1" i="0">
                 <a:solidFill>
-                  <a:srgbClr val="F3F4F6"/>
-                </a:solidFill>
-                <a:latin typeface="Inter"/>
+                  <a:srgbClr val="FFFFFF"/>
+                </a:solidFill>
+                <a:latin typeface="Georgia"/>
               </a:defRPr>
             </a:pPr>
             <a:r>
@@ -12176,9 +12600,9 @@
               </a:spcAft>
               <a:defRPr sz="5500" b="0" i="0">
                 <a:solidFill>
-                  <a:srgbClr val="F3F4F6"/>
-                </a:solidFill>
-                <a:latin typeface="Inter"/>
+                  <a:srgbClr val="FFFFFF"/>
+                </a:solidFill>
+                <a:latin typeface="Georgia"/>
               </a:defRPr>
             </a:pPr>
             <a:r>
@@ -12192,9 +12616,9 @@
               </a:spcAft>
               <a:defRPr sz="5500" b="0" i="0">
                 <a:solidFill>
-                  <a:srgbClr val="F3F4F6"/>
-                </a:solidFill>
-                <a:latin typeface="Inter"/>
+                  <a:srgbClr val="FFFFFF"/>
+                </a:solidFill>
+                <a:latin typeface="Georgia"/>
               </a:defRPr>
             </a:pPr>
             <a:r>
@@ -12208,9 +12632,9 @@
               </a:spcAft>
               <a:defRPr sz="5500" b="0" i="0">
                 <a:solidFill>
-                  <a:srgbClr val="F3F4F6"/>
-                </a:solidFill>
-                <a:latin typeface="Inter"/>
+                  <a:srgbClr val="FFFFFF"/>
+                </a:solidFill>
+                <a:latin typeface="Georgia"/>
               </a:defRPr>
             </a:pPr>
             <a:r>
@@ -12224,9 +12648,9 @@
               </a:spcAft>
               <a:defRPr sz="5500" b="0" i="0">
                 <a:solidFill>
-                  <a:srgbClr val="F3F4F6"/>
-                </a:solidFill>
-                <a:latin typeface="Inter"/>
+                  <a:srgbClr val="FFFFFF"/>
+                </a:solidFill>
+                <a:latin typeface="Georgia"/>
               </a:defRPr>
             </a:pPr>
             <a:r>
@@ -12264,9 +12688,9 @@
               </a:spcBef>
               <a:defRPr sz="1200" b="0" i="0">
                 <a:solidFill>
-                  <a:srgbClr val="B8A1FF"/>
-                </a:solidFill>
-                <a:latin typeface="Inter"/>
+                  <a:srgbClr val="D8B4FE"/>
+                </a:solidFill>
+                <a:latin typeface="Georgia"/>
               </a:defRPr>
             </a:pPr>
             <a:r>
@@ -12289,7 +12713,7 @@
     <p:bg>
       <p:bgPr>
         <a:solidFill>
-          <a:srgbClr val="1F2430"/>
+          <a:srgbClr val="211733"/>
         </a:solidFill>
         <a:effectLst/>
       </p:bgPr>
@@ -12329,9 +12753,9 @@
               </a:spcAft>
               <a:defRPr sz="5500" b="0" i="0">
                 <a:solidFill>
-                  <a:srgbClr val="F3F4F6"/>
-                </a:solidFill>
-                <a:latin typeface="Inter"/>
+                  <a:srgbClr val="FFFFFF"/>
+                </a:solidFill>
+                <a:latin typeface="Georgia"/>
               </a:defRPr>
             </a:pPr>
             <a:r>
@@ -12345,9 +12769,9 @@
               </a:spcAft>
               <a:defRPr sz="5500" b="0" i="0">
                 <a:solidFill>
-                  <a:srgbClr val="F3F4F6"/>
-                </a:solidFill>
-                <a:latin typeface="Inter"/>
+                  <a:srgbClr val="FFFFFF"/>
+                </a:solidFill>
+                <a:latin typeface="Georgia"/>
               </a:defRPr>
             </a:pPr>
             <a:r>
@@ -12361,9 +12785,9 @@
               </a:spcAft>
               <a:defRPr sz="5500" b="0" i="0">
                 <a:solidFill>
-                  <a:srgbClr val="F3F4F6"/>
-                </a:solidFill>
-                <a:latin typeface="Inter"/>
+                  <a:srgbClr val="FFFFFF"/>
+                </a:solidFill>
+                <a:latin typeface="Georgia"/>
               </a:defRPr>
             </a:pPr>
             <a:r>
@@ -12377,9 +12801,9 @@
               </a:spcAft>
               <a:defRPr sz="5500" b="0" i="0">
                 <a:solidFill>
-                  <a:srgbClr val="F3F4F6"/>
-                </a:solidFill>
-                <a:latin typeface="Inter"/>
+                  <a:srgbClr val="FFFFFF"/>
+                </a:solidFill>
+                <a:latin typeface="Georgia"/>
               </a:defRPr>
             </a:pPr>
             <a:r>
@@ -12417,9 +12841,9 @@
               </a:spcBef>
               <a:defRPr sz="1200" b="0" i="0">
                 <a:solidFill>
-                  <a:srgbClr val="B8A1FF"/>
-                </a:solidFill>
-                <a:latin typeface="Inter"/>
+                  <a:srgbClr val="D8B4FE"/>
+                </a:solidFill>
+                <a:latin typeface="Georgia"/>
               </a:defRPr>
             </a:pPr>
             <a:r>
@@ -12442,7 +12866,7 @@
     <p:bg>
       <p:bgPr>
         <a:solidFill>
-          <a:srgbClr val="1F2430"/>
+          <a:srgbClr val="211733"/>
         </a:solidFill>
         <a:effectLst/>
       </p:bgPr>
@@ -12482,9 +12906,9 @@
               </a:spcAft>
               <a:defRPr sz="5500" b="0" i="0">
                 <a:solidFill>
-                  <a:srgbClr val="F3F4F6"/>
-                </a:solidFill>
-                <a:latin typeface="Inter"/>
+                  <a:srgbClr val="FFFFFF"/>
+                </a:solidFill>
+                <a:latin typeface="Georgia"/>
               </a:defRPr>
             </a:pPr>
             <a:r>
@@ -12522,9 +12946,9 @@
               </a:spcBef>
               <a:defRPr sz="1200" b="0" i="0">
                 <a:solidFill>
-                  <a:srgbClr val="B8A1FF"/>
-                </a:solidFill>
-                <a:latin typeface="Inter"/>
+                  <a:srgbClr val="D8B4FE"/>
+                </a:solidFill>
+                <a:latin typeface="Georgia"/>
               </a:defRPr>
             </a:pPr>
             <a:r>
@@ -12547,7 +12971,7 @@
     <p:bg>
       <p:bgPr>
         <a:solidFill>
-          <a:srgbClr val="1F2430"/>
+          <a:srgbClr val="211733"/>
         </a:solidFill>
         <a:effectLst/>
       </p:bgPr>
@@ -12590,9 +13014,9 @@
               </a:spcAft>
               <a:defRPr sz="5500" b="1" i="0">
                 <a:solidFill>
-                  <a:srgbClr val="B8A1FF"/>
-                </a:solidFill>
-                <a:latin typeface="Inter"/>
+                  <a:srgbClr val="D8B4FE"/>
+                </a:solidFill>
+                <a:latin typeface="Georgia"/>
               </a:defRPr>
             </a:pPr>
             <a:r>
@@ -12630,9 +13054,9 @@
               </a:spcBef>
               <a:defRPr sz="1200" b="0" i="0">
                 <a:solidFill>
-                  <a:srgbClr val="B8A1FF"/>
-                </a:solidFill>
-                <a:latin typeface="Inter"/>
+                  <a:srgbClr val="D8B4FE"/>
+                </a:solidFill>
+                <a:latin typeface="Georgia"/>
               </a:defRPr>
             </a:pPr>
             <a:r>
@@ -12655,7 +13079,7 @@
     <p:bg>
       <p:bgPr>
         <a:solidFill>
-          <a:srgbClr val="1F2430"/>
+          <a:srgbClr val="211733"/>
         </a:solidFill>
         <a:effectLst/>
       </p:bgPr>
@@ -12698,9 +13122,9 @@
               </a:spcAft>
               <a:defRPr sz="5500" b="1" i="0">
                 <a:solidFill>
-                  <a:srgbClr val="F3F4F6"/>
-                </a:solidFill>
-                <a:latin typeface="Inter"/>
+                  <a:srgbClr val="FFFFFF"/>
+                </a:solidFill>
+                <a:latin typeface="Georgia"/>
               </a:defRPr>
             </a:pPr>
             <a:r>
@@ -12738,9 +13162,9 @@
               </a:spcBef>
               <a:defRPr sz="1200" b="0" i="0">
                 <a:solidFill>
-                  <a:srgbClr val="B8A1FF"/>
-                </a:solidFill>
-                <a:latin typeface="Inter"/>
+                  <a:srgbClr val="D8B4FE"/>
+                </a:solidFill>
+                <a:latin typeface="Georgia"/>
               </a:defRPr>
             </a:pPr>
             <a:r>
@@ -12765,10 +13189,10 @@
         <a:gradFill rotWithShape="1">
           <a:gsLst>
             <a:gs pos="0">
-              <a:srgbClr val="0C0D11"/>
+              <a:srgbClr val="0C0B11"/>
             </a:gs>
             <a:gs pos="100000">
-              <a:srgbClr val="5E616A"/>
+              <a:srgbClr val="5F586C"/>
             </a:gs>
           </a:gsLst>
           <a:lin scaled="0" ang="0"/>
@@ -12800,13 +13224,13 @@
             </a:avLst>
           </a:prstGeom>
           <a:solidFill>
-            <a:srgbClr val="1F2430">
+            <a:srgbClr val="211733">
               <a:alpha val="44706"/>
             </a:srgbClr>
           </a:solidFill>
           <a:ln w="14299" cap="sq">
             <a:solidFill>
-              <a:srgbClr val="6B6E76">
+              <a:srgbClr val="6C6678">
                 <a:alpha val="44706"/>
               </a:srgbClr>
             </a:solidFill>
@@ -12851,13 +13275,13 @@
             </a:avLst>
           </a:prstGeom>
           <a:solidFill>
-            <a:srgbClr val="151820">
+            <a:srgbClr val="161122">
               <a:alpha val="60784"/>
             </a:srgbClr>
           </a:solidFill>
           <a:ln w="14299" cap="sq">
             <a:solidFill>
-              <a:srgbClr val="151820">
+              <a:srgbClr val="161122">
                 <a:alpha val="60784"/>
               </a:srgbClr>
             </a:solidFill>
@@ -12913,7 +13337,7 @@
               </a:lnSpc>
               <a:defRPr sz="3700" b="1" i="0">
                 <a:solidFill>
-                  <a:srgbClr val="D6C8FF"/>
+                  <a:srgbClr val="E8D4FE"/>
                 </a:solidFill>
                 <a:latin typeface="Calibri"/>
               </a:defRPr>
@@ -12952,7 +13376,7 @@
               </a:lnSpc>
               <a:defRPr sz="5800" b="1" i="0">
                 <a:solidFill>
-                  <a:srgbClr val="F3F4F6"/>
+                  <a:srgbClr val="FFFFFF"/>
                 </a:solidFill>
                 <a:latin typeface="Calibri"/>
               </a:defRPr>
@@ -12991,7 +13415,7 @@
               </a:lnSpc>
               <a:defRPr sz="4900" b="1" i="1">
                 <a:solidFill>
-                  <a:srgbClr val="F3F4F6"/>
+                  <a:srgbClr val="FFFFFF"/>
                 </a:solidFill>
                 <a:latin typeface="Calibri"/>
               </a:defRPr>
@@ -13030,7 +13454,7 @@
               </a:lnSpc>
               <a:defRPr sz="3200" b="0" i="0">
                 <a:solidFill>
-                  <a:srgbClr val="DED3F4"/>
+                  <a:srgbClr val="FEF5E4"/>
                 </a:solidFill>
                 <a:latin typeface="Calibri"/>
               </a:defRPr>
@@ -13046,7 +13470,7 @@
               </a:lnSpc>
               <a:defRPr sz="3200" b="0" i="0">
                 <a:solidFill>
-                  <a:srgbClr val="DED3F4"/>
+                  <a:srgbClr val="FEF5E4"/>
                 </a:solidFill>
                 <a:latin typeface="Calibri"/>
               </a:defRPr>
@@ -13062,7 +13486,7 @@
               </a:lnSpc>
               <a:defRPr sz="3200" b="0" i="0">
                 <a:solidFill>
-                  <a:srgbClr val="DED3F4"/>
+                  <a:srgbClr val="FEF5E4"/>
                 </a:solidFill>
                 <a:latin typeface="Calibri"/>
               </a:defRPr>
@@ -13101,7 +13525,7 @@
               </a:lnSpc>
               <a:defRPr sz="4100" b="1" i="0">
                 <a:solidFill>
-                  <a:srgbClr val="C1ACFF"/>
+                  <a:srgbClr val="DDBDFE"/>
                 </a:solidFill>
                 <a:latin typeface="Calibri"/>
               </a:defRPr>
@@ -13140,7 +13564,7 @@
               </a:lnSpc>
               <a:defRPr sz="3600" b="1" i="0">
                 <a:solidFill>
-                  <a:srgbClr val="F3F4F6"/>
+                  <a:srgbClr val="FFFFFF"/>
                 </a:solidFill>
                 <a:latin typeface="Calibri"/>
               </a:defRPr>
@@ -13165,7 +13589,7 @@
     <p:bg>
       <p:bgPr>
         <a:solidFill>
-          <a:srgbClr val="1F2430"/>
+          <a:srgbClr val="211733"/>
         </a:solidFill>
         <a:effectLst/>
       </p:bgPr>
@@ -13401,9 +13825,9 @@
               </a:spcBef>
               <a:defRPr sz="1200" b="0" i="0">
                 <a:solidFill>
-                  <a:srgbClr val="B8A1FF"/>
-                </a:solidFill>
-                <a:latin typeface="Inter"/>
+                  <a:srgbClr val="D8B4FE"/>
+                </a:solidFill>
+                <a:latin typeface="Georgia"/>
               </a:defRPr>
             </a:pPr>
             <a:r>
@@ -13568,7 +13992,7 @@
                 <a:solidFill>
                   <a:srgbClr val="FFCC4D"/>
                 </a:solidFill>
-                <a:latin typeface="Inter"/>
+                <a:latin typeface="Georgia"/>
               </a:defRPr>
             </a:pPr>
             <a:r>
@@ -13591,7 +14015,7 @@
     <p:bg>
       <p:bgPr>
         <a:solidFill>
-          <a:srgbClr val="1F2430"/>
+          <a:srgbClr val="211733"/>
         </a:solidFill>
         <a:effectLst/>
       </p:bgPr>
@@ -14067,9 +14491,9 @@
               </a:spcBef>
               <a:defRPr sz="1200" b="0" i="0">
                 <a:solidFill>
-                  <a:srgbClr val="B8A1FF"/>
-                </a:solidFill>
-                <a:latin typeface="Inter"/>
+                  <a:srgbClr val="D8B4FE"/>
+                </a:solidFill>
+                <a:latin typeface="Georgia"/>
               </a:defRPr>
             </a:pPr>
             <a:r>
@@ -14092,7 +14516,7 @@
     <p:bg>
       <p:bgPr>
         <a:solidFill>
-          <a:srgbClr val="1F2430"/>
+          <a:srgbClr val="211733"/>
         </a:solidFill>
         <a:effectLst/>
       </p:bgPr>
@@ -14135,9 +14559,9 @@
               </a:spcAft>
               <a:defRPr sz="5500" b="1" i="0">
                 <a:solidFill>
-                  <a:srgbClr val="B8A1FF"/>
-                </a:solidFill>
-                <a:latin typeface="Inter"/>
+                  <a:srgbClr val="D8B4FE"/>
+                </a:solidFill>
+                <a:latin typeface="Georgia"/>
               </a:defRPr>
             </a:pPr>
             <a:r>
@@ -14154,9 +14578,9 @@
               </a:spcAft>
               <a:defRPr sz="5500" b="1" i="0">
                 <a:solidFill>
-                  <a:srgbClr val="F3F4F6"/>
-                </a:solidFill>
-                <a:latin typeface="Inter"/>
+                  <a:srgbClr val="FFFFFF"/>
+                </a:solidFill>
+                <a:latin typeface="Georgia"/>
               </a:defRPr>
             </a:pPr>
             <a:r>
@@ -14194,9 +14618,9 @@
               </a:spcBef>
               <a:defRPr sz="1200" b="0" i="0">
                 <a:solidFill>
-                  <a:srgbClr val="B8A1FF"/>
-                </a:solidFill>
-                <a:latin typeface="Inter"/>
+                  <a:srgbClr val="D8B4FE"/>
+                </a:solidFill>
+                <a:latin typeface="Georgia"/>
               </a:defRPr>
             </a:pPr>
             <a:r>
@@ -14221,10 +14645,10 @@
         <a:gradFill rotWithShape="1">
           <a:gsLst>
             <a:gs pos="0">
-              <a:srgbClr val="0C0D11"/>
+              <a:srgbClr val="0C0B11"/>
             </a:gs>
             <a:gs pos="100000">
-              <a:srgbClr val="5E616A"/>
+              <a:srgbClr val="5F586C"/>
             </a:gs>
           </a:gsLst>
           <a:lin scaled="0" ang="0"/>
@@ -14256,13 +14680,13 @@
             </a:avLst>
           </a:prstGeom>
           <a:solidFill>
-            <a:srgbClr val="1F2430">
+            <a:srgbClr val="211733">
               <a:alpha val="44706"/>
             </a:srgbClr>
           </a:solidFill>
           <a:ln w="14299" cap="sq">
             <a:solidFill>
-              <a:srgbClr val="6B6E76">
+              <a:srgbClr val="6C6678">
                 <a:alpha val="44706"/>
               </a:srgbClr>
             </a:solidFill>
@@ -14307,13 +14731,13 @@
             </a:avLst>
           </a:prstGeom>
           <a:solidFill>
-            <a:srgbClr val="151820">
+            <a:srgbClr val="161122">
               <a:alpha val="60784"/>
             </a:srgbClr>
           </a:solidFill>
           <a:ln w="14299" cap="sq">
             <a:solidFill>
-              <a:srgbClr val="151820">
+              <a:srgbClr val="161122">
                 <a:alpha val="60784"/>
               </a:srgbClr>
             </a:solidFill>
@@ -14369,7 +14793,7 @@
               </a:lnSpc>
               <a:defRPr sz="3700" b="1" i="0">
                 <a:solidFill>
-                  <a:srgbClr val="D6C8FF"/>
+                  <a:srgbClr val="E8D4FE"/>
                 </a:solidFill>
                 <a:latin typeface="Calibri"/>
               </a:defRPr>
@@ -14408,7 +14832,7 @@
               </a:lnSpc>
               <a:defRPr sz="5800" b="1" i="0">
                 <a:solidFill>
-                  <a:srgbClr val="F3F4F6"/>
+                  <a:srgbClr val="FFFFFF"/>
                 </a:solidFill>
                 <a:latin typeface="Calibri"/>
               </a:defRPr>
@@ -14447,7 +14871,7 @@
               </a:lnSpc>
               <a:defRPr sz="4900" b="1" i="1">
                 <a:solidFill>
-                  <a:srgbClr val="F3F4F6"/>
+                  <a:srgbClr val="FFFFFF"/>
                 </a:solidFill>
                 <a:latin typeface="Calibri"/>
               </a:defRPr>
@@ -14486,7 +14910,7 @@
               </a:lnSpc>
               <a:defRPr sz="3200" b="0" i="0">
                 <a:solidFill>
-                  <a:srgbClr val="DED3F4"/>
+                  <a:srgbClr val="FEF5E4"/>
                 </a:solidFill>
                 <a:latin typeface="Calibri"/>
               </a:defRPr>
@@ -14502,7 +14926,7 @@
               </a:lnSpc>
               <a:defRPr sz="3200" b="0" i="0">
                 <a:solidFill>
-                  <a:srgbClr val="DED3F4"/>
+                  <a:srgbClr val="FEF5E4"/>
                 </a:solidFill>
                 <a:latin typeface="Calibri"/>
               </a:defRPr>
@@ -14518,7 +14942,7 @@
               </a:lnSpc>
               <a:defRPr sz="3200" b="0" i="0">
                 <a:solidFill>
-                  <a:srgbClr val="DED3F4"/>
+                  <a:srgbClr val="FEF5E4"/>
                 </a:solidFill>
                 <a:latin typeface="Calibri"/>
               </a:defRPr>
@@ -14557,7 +14981,7 @@
               </a:lnSpc>
               <a:defRPr sz="4100" b="1" i="0">
                 <a:solidFill>
-                  <a:srgbClr val="C1ACFF"/>
+                  <a:srgbClr val="DDBDFE"/>
                 </a:solidFill>
                 <a:latin typeface="Calibri"/>
               </a:defRPr>
@@ -14596,7 +15020,7 @@
               </a:lnSpc>
               <a:defRPr sz="3600" b="1" i="0">
                 <a:solidFill>
-                  <a:srgbClr val="F3F4F6"/>
+                  <a:srgbClr val="FFFFFF"/>
                 </a:solidFill>
                 <a:latin typeface="Calibri"/>
               </a:defRPr>
@@ -14799,7 +15223,7 @@
                 <a:solidFill>
                   <a:srgbClr val="FFCC4D"/>
                 </a:solidFill>
-                <a:latin typeface="Inter"/>
+                <a:latin typeface="Georgia"/>
               </a:defRPr>
             </a:pPr>
             <a:r>
@@ -14964,7 +15388,7 @@
                 <a:solidFill>
                   <a:srgbClr val="FFCC4D"/>
                 </a:solidFill>
-                <a:latin typeface="Inter"/>
+                <a:latin typeface="Georgia"/>
               </a:defRPr>
             </a:pPr>
             <a:r>
@@ -15148,7 +15572,7 @@
                 <a:solidFill>
                   <a:srgbClr val="FFCC4D"/>
                 </a:solidFill>
-                <a:latin typeface="Inter"/>
+                <a:latin typeface="Georgia"/>
               </a:defRPr>
             </a:pPr>
             <a:r>
@@ -15294,7 +15718,7 @@
                 <a:solidFill>
                   <a:srgbClr val="FFCC4D"/>
                 </a:solidFill>
-                <a:latin typeface="Inter"/>
+                <a:latin typeface="Georgia"/>
               </a:defRPr>
             </a:pPr>
             <a:r>
@@ -15478,7 +15902,7 @@
                 <a:solidFill>
                   <a:srgbClr val="FFCC4D"/>
                 </a:solidFill>
-                <a:latin typeface="Inter"/>
+                <a:latin typeface="Georgia"/>
               </a:defRPr>
             </a:pPr>
             <a:r>
@@ -15681,7 +16105,7 @@
                 <a:solidFill>
                   <a:srgbClr val="FFCC4D"/>
                 </a:solidFill>
-                <a:latin typeface="Inter"/>
+                <a:latin typeface="Georgia"/>
               </a:defRPr>
             </a:pPr>
             <a:r>
@@ -15825,7 +16249,7 @@
                 <a:solidFill>
                   <a:srgbClr val="FFCC4D"/>
                 </a:solidFill>
-                <a:latin typeface="Inter"/>
+                <a:latin typeface="Georgia"/>
               </a:defRPr>
             </a:pPr>
             <a:r>
@@ -15889,9 +16313,9 @@
               <a:spcAft>
                 <a:spcPts val="600"/>
               </a:spcAft>
-              <a:defRPr sz="5100" b="1" i="0">
-                <a:solidFill>
-                  <a:srgbClr val="FFFFFF"/>
+              <a:defRPr sz="5100" b="1" i="1">
+                <a:solidFill>
+                  <a:srgbClr val="FFB800"/>
                 </a:solidFill>
                 <a:latin typeface="Poppins Bold"/>
               </a:defRPr>
@@ -15908,9 +16332,9 @@
               <a:spcAft>
                 <a:spcPts val="600"/>
               </a:spcAft>
-              <a:defRPr sz="5100" b="1" i="0">
-                <a:solidFill>
-                  <a:srgbClr val="FFFFFF"/>
+              <a:defRPr sz="5100" b="1" i="1">
+                <a:solidFill>
+                  <a:srgbClr val="FFB800"/>
                 </a:solidFill>
                 <a:latin typeface="Poppins Bold"/>
               </a:defRPr>
@@ -15927,9 +16351,9 @@
               <a:spcAft>
                 <a:spcPts val="600"/>
               </a:spcAft>
-              <a:defRPr sz="5100" b="1" i="0">
-                <a:solidFill>
-                  <a:srgbClr val="FFFFFF"/>
+              <a:defRPr sz="5100" b="1" i="1">
+                <a:solidFill>
+                  <a:srgbClr val="FFB800"/>
                 </a:solidFill>
                 <a:latin typeface="Poppins Bold"/>
               </a:defRPr>
@@ -15946,9 +16370,9 @@
               <a:spcAft>
                 <a:spcPts val="600"/>
               </a:spcAft>
-              <a:defRPr sz="5100" b="1" i="0">
-                <a:solidFill>
-                  <a:srgbClr val="FFFFFF"/>
+              <a:defRPr sz="5100" b="1" i="1">
+                <a:solidFill>
+                  <a:srgbClr val="FFB800"/>
                 </a:solidFill>
                 <a:latin typeface="Poppins Bold"/>
               </a:defRPr>
@@ -15965,9 +16389,9 @@
               <a:spcAft>
                 <a:spcPts val="600"/>
               </a:spcAft>
-              <a:defRPr sz="5100" b="1" i="0">
-                <a:solidFill>
-                  <a:srgbClr val="FFFFFF"/>
+              <a:defRPr sz="5100" b="1" i="1">
+                <a:solidFill>
+                  <a:srgbClr val="FFB800"/>
                 </a:solidFill>
                 <a:latin typeface="Poppins Bold"/>
               </a:defRPr>
@@ -16009,7 +16433,7 @@
                 <a:solidFill>
                   <a:srgbClr val="FFCC4D"/>
                 </a:solidFill>
-                <a:latin typeface="Inter"/>
+                <a:latin typeface="Georgia"/>
               </a:defRPr>
             </a:pPr>
             <a:r>
@@ -16032,7 +16456,7 @@
     <p:bg>
       <p:bgPr>
         <a:solidFill>
-          <a:srgbClr val="1F2430"/>
+          <a:srgbClr val="211733"/>
         </a:solidFill>
         <a:effectLst/>
       </p:bgPr>
@@ -16075,9 +16499,9 @@
               </a:spcAft>
               <a:defRPr sz="5500" b="1" i="0">
                 <a:solidFill>
-                  <a:srgbClr val="B8A1FF"/>
-                </a:solidFill>
-                <a:latin typeface="Inter"/>
+                  <a:srgbClr val="D8B4FE"/>
+                </a:solidFill>
+                <a:latin typeface="Georgia"/>
               </a:defRPr>
             </a:pPr>
             <a:r>
@@ -16094,9 +16518,9 @@
               </a:spcAft>
               <a:defRPr sz="5500" b="1" i="0">
                 <a:solidFill>
-                  <a:srgbClr val="F3F4F6"/>
-                </a:solidFill>
-                <a:latin typeface="Inter"/>
+                  <a:srgbClr val="FFFFFF"/>
+                </a:solidFill>
+                <a:latin typeface="Georgia"/>
               </a:defRPr>
             </a:pPr>
             <a:r>
@@ -16134,9 +16558,9 @@
               </a:spcBef>
               <a:defRPr sz="1200" b="0" i="0">
                 <a:solidFill>
-                  <a:srgbClr val="B8A1FF"/>
-                </a:solidFill>
-                <a:latin typeface="Inter"/>
+                  <a:srgbClr val="D8B4FE"/>
+                </a:solidFill>
+                <a:latin typeface="Georgia"/>
               </a:defRPr>
             </a:pPr>
             <a:r>
@@ -16161,10 +16585,10 @@
         <a:gradFill rotWithShape="1">
           <a:gsLst>
             <a:gs pos="0">
-              <a:srgbClr val="0C0D11"/>
+              <a:srgbClr val="0C0B11"/>
             </a:gs>
             <a:gs pos="100000">
-              <a:srgbClr val="5E616A"/>
+              <a:srgbClr val="5F586C"/>
             </a:gs>
           </a:gsLst>
           <a:lin scaled="0" ang="0"/>
@@ -16196,13 +16620,13 @@
             </a:avLst>
           </a:prstGeom>
           <a:solidFill>
-            <a:srgbClr val="1F2430">
+            <a:srgbClr val="211733">
               <a:alpha val="44706"/>
             </a:srgbClr>
           </a:solidFill>
           <a:ln w="14299" cap="sq">
             <a:solidFill>
-              <a:srgbClr val="6B6E76">
+              <a:srgbClr val="6C6678">
                 <a:alpha val="44706"/>
               </a:srgbClr>
             </a:solidFill>
@@ -16247,13 +16671,13 @@
             </a:avLst>
           </a:prstGeom>
           <a:solidFill>
-            <a:srgbClr val="151820">
+            <a:srgbClr val="161122">
               <a:alpha val="60784"/>
             </a:srgbClr>
           </a:solidFill>
           <a:ln w="14299" cap="sq">
             <a:solidFill>
-              <a:srgbClr val="151820">
+              <a:srgbClr val="161122">
                 <a:alpha val="60784"/>
               </a:srgbClr>
             </a:solidFill>
@@ -16309,7 +16733,7 @@
               </a:lnSpc>
               <a:defRPr sz="3700" b="1" i="0">
                 <a:solidFill>
-                  <a:srgbClr val="D6C8FF"/>
+                  <a:srgbClr val="E8D4FE"/>
                 </a:solidFill>
                 <a:latin typeface="Calibri"/>
               </a:defRPr>
@@ -16348,7 +16772,7 @@
               </a:lnSpc>
               <a:defRPr sz="5800" b="1" i="0">
                 <a:solidFill>
-                  <a:srgbClr val="F3F4F6"/>
+                  <a:srgbClr val="FFFFFF"/>
                 </a:solidFill>
                 <a:latin typeface="Calibri"/>
               </a:defRPr>
@@ -16387,7 +16811,7 @@
               </a:lnSpc>
               <a:defRPr sz="4900" b="1" i="1">
                 <a:solidFill>
-                  <a:srgbClr val="F3F4F6"/>
+                  <a:srgbClr val="FFFFFF"/>
                 </a:solidFill>
                 <a:latin typeface="Calibri"/>
               </a:defRPr>
@@ -16426,7 +16850,7 @@
               </a:lnSpc>
               <a:defRPr sz="3200" b="0" i="0">
                 <a:solidFill>
-                  <a:srgbClr val="DED3F4"/>
+                  <a:srgbClr val="FEF5E4"/>
                 </a:solidFill>
                 <a:latin typeface="Calibri"/>
               </a:defRPr>
@@ -16442,7 +16866,7 @@
               </a:lnSpc>
               <a:defRPr sz="3200" b="0" i="0">
                 <a:solidFill>
-                  <a:srgbClr val="DED3F4"/>
+                  <a:srgbClr val="FEF5E4"/>
                 </a:solidFill>
                 <a:latin typeface="Calibri"/>
               </a:defRPr>
@@ -16458,7 +16882,7 @@
               </a:lnSpc>
               <a:defRPr sz="3200" b="0" i="0">
                 <a:solidFill>
-                  <a:srgbClr val="DED3F4"/>
+                  <a:srgbClr val="FEF5E4"/>
                 </a:solidFill>
                 <a:latin typeface="Calibri"/>
               </a:defRPr>
@@ -16497,7 +16921,7 @@
               </a:lnSpc>
               <a:defRPr sz="4100" b="1" i="0">
                 <a:solidFill>
-                  <a:srgbClr val="C1ACFF"/>
+                  <a:srgbClr val="DDBDFE"/>
                 </a:solidFill>
                 <a:latin typeface="Calibri"/>
               </a:defRPr>
@@ -16536,7 +16960,7 @@
               </a:lnSpc>
               <a:defRPr sz="3600" b="1" i="0">
                 <a:solidFill>
-                  <a:srgbClr val="F3F4F6"/>
+                  <a:srgbClr val="FFFFFF"/>
                 </a:solidFill>
                 <a:latin typeface="Calibri"/>
               </a:defRPr>
@@ -16561,7 +16985,7 @@
     <p:bg>
       <p:bgPr>
         <a:solidFill>
-          <a:srgbClr val="1F2430"/>
+          <a:srgbClr val="211733"/>
         </a:solidFill>
         <a:effectLst/>
       </p:bgPr>
@@ -16601,9 +17025,9 @@
               </a:spcAft>
               <a:defRPr sz="5500" b="1" i="0">
                 <a:solidFill>
-                  <a:srgbClr val="F3F4F6"/>
-                </a:solidFill>
-                <a:latin typeface="Inter"/>
+                  <a:srgbClr val="FFFFFF"/>
+                </a:solidFill>
+                <a:latin typeface="Georgia"/>
               </a:defRPr>
             </a:pPr>
             <a:r>
@@ -16617,9 +17041,9 @@
               </a:spcAft>
               <a:defRPr sz="5500" b="0" i="0">
                 <a:solidFill>
-                  <a:srgbClr val="F3F4F6"/>
-                </a:solidFill>
-                <a:latin typeface="Inter"/>
+                  <a:srgbClr val="FFFFFF"/>
+                </a:solidFill>
+                <a:latin typeface="Georgia"/>
               </a:defRPr>
             </a:pPr>
             <a:r>
@@ -16633,9 +17057,9 @@
               </a:spcAft>
               <a:defRPr sz="5500" b="0" i="0">
                 <a:solidFill>
-                  <a:srgbClr val="F3F4F6"/>
-                </a:solidFill>
-                <a:latin typeface="Inter"/>
+                  <a:srgbClr val="FFFFFF"/>
+                </a:solidFill>
+                <a:latin typeface="Georgia"/>
               </a:defRPr>
             </a:pPr>
             <a:r>
@@ -16673,9 +17097,9 @@
               </a:spcBef>
               <a:defRPr sz="1200" b="0" i="0">
                 <a:solidFill>
-                  <a:srgbClr val="B8A1FF"/>
-                </a:solidFill>
-                <a:latin typeface="Inter"/>
+                  <a:srgbClr val="D8B4FE"/>
+                </a:solidFill>
+                <a:latin typeface="Georgia"/>
               </a:defRPr>
             </a:pPr>
             <a:r>
@@ -16698,7 +17122,7 @@
     <p:bg>
       <p:bgPr>
         <a:solidFill>
-          <a:srgbClr val="1F2430"/>
+          <a:srgbClr val="211733"/>
         </a:solidFill>
         <a:effectLst/>
       </p:bgPr>
@@ -16738,9 +17162,9 @@
               </a:spcAft>
               <a:defRPr sz="5500" b="1" i="0">
                 <a:solidFill>
-                  <a:srgbClr val="F3F4F6"/>
-                </a:solidFill>
-                <a:latin typeface="Inter"/>
+                  <a:srgbClr val="FFFFFF"/>
+                </a:solidFill>
+                <a:latin typeface="Georgia"/>
               </a:defRPr>
             </a:pPr>
             <a:r>
@@ -16778,9 +17202,9 @@
               </a:spcBef>
               <a:defRPr sz="1200" b="0" i="0">
                 <a:solidFill>
-                  <a:srgbClr val="B8A1FF"/>
-                </a:solidFill>
-                <a:latin typeface="Inter"/>
+                  <a:srgbClr val="D8B4FE"/>
+                </a:solidFill>
+                <a:latin typeface="Georgia"/>
               </a:defRPr>
             </a:pPr>
             <a:r>
@@ -16803,7 +17227,7 @@
     <p:bg>
       <p:bgPr>
         <a:solidFill>
-          <a:srgbClr val="1F2430"/>
+          <a:srgbClr val="211733"/>
         </a:solidFill>
         <a:effectLst/>
       </p:bgPr>
@@ -16843,9 +17267,9 @@
               </a:spcAft>
               <a:defRPr sz="5500" b="1" i="0">
                 <a:solidFill>
-                  <a:srgbClr val="F3F4F6"/>
-                </a:solidFill>
-                <a:latin typeface="Inter"/>
+                  <a:srgbClr val="FFFFFF"/>
+                </a:solidFill>
+                <a:latin typeface="Georgia"/>
               </a:defRPr>
             </a:pPr>
             <a:r>
@@ -16883,9 +17307,9 @@
               </a:spcBef>
               <a:defRPr sz="1200" b="0" i="0">
                 <a:solidFill>
-                  <a:srgbClr val="B8A1FF"/>
-                </a:solidFill>
-                <a:latin typeface="Inter"/>
+                  <a:srgbClr val="D8B4FE"/>
+                </a:solidFill>
+                <a:latin typeface="Georgia"/>
               </a:defRPr>
             </a:pPr>
             <a:r>
@@ -16908,7 +17332,7 @@
     <p:bg>
       <p:bgPr>
         <a:solidFill>
-          <a:srgbClr val="1F2430"/>
+          <a:srgbClr val="211733"/>
         </a:solidFill>
         <a:effectLst/>
       </p:bgPr>
@@ -16948,9 +17372,9 @@
               </a:spcAft>
               <a:defRPr sz="5500" b="1" i="0">
                 <a:solidFill>
-                  <a:srgbClr val="F3F4F6"/>
-                </a:solidFill>
-                <a:latin typeface="Inter"/>
+                  <a:srgbClr val="FFFFFF"/>
+                </a:solidFill>
+                <a:latin typeface="Georgia"/>
               </a:defRPr>
             </a:pPr>
             <a:r>
@@ -16988,9 +17412,9 @@
               </a:spcBef>
               <a:defRPr sz="1200" b="0" i="0">
                 <a:solidFill>
-                  <a:srgbClr val="B8A1FF"/>
-                </a:solidFill>
-                <a:latin typeface="Inter"/>
+                  <a:srgbClr val="D8B4FE"/>
+                </a:solidFill>
+                <a:latin typeface="Georgia"/>
               </a:defRPr>
             </a:pPr>
             <a:r>
@@ -17013,7 +17437,7 @@
     <p:bg>
       <p:bgPr>
         <a:solidFill>
-          <a:srgbClr val="1F2430"/>
+          <a:srgbClr val="211733"/>
         </a:solidFill>
         <a:effectLst/>
       </p:bgPr>
@@ -17053,9 +17477,9 @@
               </a:spcAft>
               <a:defRPr sz="5500" b="1" i="0">
                 <a:solidFill>
-                  <a:srgbClr val="F3F4F6"/>
-                </a:solidFill>
-                <a:latin typeface="Inter"/>
+                  <a:srgbClr val="FFFFFF"/>
+                </a:solidFill>
+                <a:latin typeface="Georgia"/>
               </a:defRPr>
             </a:pPr>
             <a:r>
@@ -17093,9 +17517,9 @@
               </a:spcBef>
               <a:defRPr sz="1200" b="0" i="0">
                 <a:solidFill>
-                  <a:srgbClr val="B8A1FF"/>
-                </a:solidFill>
-                <a:latin typeface="Inter"/>
+                  <a:srgbClr val="D8B4FE"/>
+                </a:solidFill>
+                <a:latin typeface="Georgia"/>
               </a:defRPr>
             </a:pPr>
             <a:r>
@@ -17118,7 +17542,7 @@
     <p:bg>
       <p:bgPr>
         <a:solidFill>
-          <a:srgbClr val="1F2430"/>
+          <a:srgbClr val="211733"/>
         </a:solidFill>
         <a:effectLst/>
       </p:bgPr>
@@ -17161,9 +17585,9 @@
               </a:spcAft>
               <a:defRPr sz="5500" b="1" i="0">
                 <a:solidFill>
-                  <a:srgbClr val="B8A1FF"/>
-                </a:solidFill>
-                <a:latin typeface="Inter"/>
+                  <a:srgbClr val="D8B4FE"/>
+                </a:solidFill>
+                <a:latin typeface="Georgia"/>
               </a:defRPr>
             </a:pPr>
             <a:r>
@@ -17180,9 +17604,9 @@
               </a:spcAft>
               <a:defRPr sz="5500" b="1" i="0">
                 <a:solidFill>
-                  <a:srgbClr val="F3F4F6"/>
-                </a:solidFill>
-                <a:latin typeface="Inter"/>
+                  <a:srgbClr val="FFFFFF"/>
+                </a:solidFill>
+                <a:latin typeface="Georgia"/>
               </a:defRPr>
             </a:pPr>
             <a:r>
@@ -17199,9 +17623,9 @@
               </a:spcAft>
               <a:defRPr sz="5500" b="1" i="0">
                 <a:solidFill>
-                  <a:srgbClr val="B8A1FF"/>
-                </a:solidFill>
-                <a:latin typeface="Inter"/>
+                  <a:srgbClr val="D8B4FE"/>
+                </a:solidFill>
+                <a:latin typeface="Georgia"/>
               </a:defRPr>
             </a:pPr>
             <a:r>
@@ -17218,9 +17642,9 @@
               </a:spcAft>
               <a:defRPr sz="5500" b="1" i="0">
                 <a:solidFill>
-                  <a:srgbClr val="F3F4F6"/>
-                </a:solidFill>
-                <a:latin typeface="Inter"/>
+                  <a:srgbClr val="FFFFFF"/>
+                </a:solidFill>
+                <a:latin typeface="Georgia"/>
               </a:defRPr>
             </a:pPr>
             <a:r>
@@ -17237,9 +17661,9 @@
               </a:spcAft>
               <a:defRPr sz="5500" b="1" i="0">
                 <a:solidFill>
-                  <a:srgbClr val="B8A1FF"/>
-                </a:solidFill>
-                <a:latin typeface="Inter"/>
+                  <a:srgbClr val="D8B4FE"/>
+                </a:solidFill>
+                <a:latin typeface="Georgia"/>
               </a:defRPr>
             </a:pPr>
             <a:r>
@@ -17256,9 +17680,9 @@
               </a:spcAft>
               <a:defRPr sz="5500" b="1" i="0">
                 <a:solidFill>
-                  <a:srgbClr val="F3F4F6"/>
-                </a:solidFill>
-                <a:latin typeface="Inter"/>
+                  <a:srgbClr val="FFFFFF"/>
+                </a:solidFill>
+                <a:latin typeface="Georgia"/>
               </a:defRPr>
             </a:pPr>
             <a:r>
@@ -17296,9 +17720,9 @@
               </a:spcBef>
               <a:defRPr sz="1200" b="0" i="0">
                 <a:solidFill>
-                  <a:srgbClr val="B8A1FF"/>
-                </a:solidFill>
-                <a:latin typeface="Inter"/>
+                  <a:srgbClr val="D8B4FE"/>
+                </a:solidFill>
+                <a:latin typeface="Georgia"/>
               </a:defRPr>
             </a:pPr>
             <a:r>
@@ -17499,7 +17923,7 @@
                 <a:solidFill>
                   <a:srgbClr val="FFCC4D"/>
                 </a:solidFill>
-                <a:latin typeface="Inter"/>
+                <a:latin typeface="Georgia"/>
               </a:defRPr>
             </a:pPr>
             <a:r>
@@ -17626,7 +18050,7 @@
                 <a:solidFill>
                   <a:srgbClr val="FFCC4D"/>
                 </a:solidFill>
-                <a:latin typeface="Inter"/>
+                <a:latin typeface="Georgia"/>
               </a:defRPr>
             </a:pPr>
             <a:r>
@@ -17651,10 +18075,10 @@
         <a:gradFill rotWithShape="1">
           <a:gsLst>
             <a:gs pos="0">
-              <a:srgbClr val="0C0D11"/>
+              <a:srgbClr val="0C0B11"/>
             </a:gs>
             <a:gs pos="100000">
-              <a:srgbClr val="5E616A"/>
+              <a:srgbClr val="5F586C"/>
             </a:gs>
           </a:gsLst>
           <a:lin scaled="0" ang="0"/>
@@ -17686,13 +18110,13 @@
             </a:avLst>
           </a:prstGeom>
           <a:solidFill>
-            <a:srgbClr val="1F2430">
+            <a:srgbClr val="211733">
               <a:alpha val="44706"/>
             </a:srgbClr>
           </a:solidFill>
           <a:ln w="14299" cap="sq">
             <a:solidFill>
-              <a:srgbClr val="6B6E76">
+              <a:srgbClr val="6C6678">
                 <a:alpha val="44706"/>
               </a:srgbClr>
             </a:solidFill>
@@ -17737,13 +18161,13 @@
             </a:avLst>
           </a:prstGeom>
           <a:solidFill>
-            <a:srgbClr val="151820">
+            <a:srgbClr val="161122">
               <a:alpha val="60784"/>
             </a:srgbClr>
           </a:solidFill>
           <a:ln w="14299" cap="sq">
             <a:solidFill>
-              <a:srgbClr val="151820">
+              <a:srgbClr val="161122">
                 <a:alpha val="60784"/>
               </a:srgbClr>
             </a:solidFill>
@@ -17799,7 +18223,7 @@
               </a:lnSpc>
               <a:defRPr sz="3700" b="1" i="0">
                 <a:solidFill>
-                  <a:srgbClr val="D6C8FF"/>
+                  <a:srgbClr val="E8D4FE"/>
                 </a:solidFill>
                 <a:latin typeface="Calibri"/>
               </a:defRPr>
@@ -17838,7 +18262,7 @@
               </a:lnSpc>
               <a:defRPr sz="5800" b="1" i="0">
                 <a:solidFill>
-                  <a:srgbClr val="F3F4F6"/>
+                  <a:srgbClr val="FFFFFF"/>
                 </a:solidFill>
                 <a:latin typeface="Calibri"/>
               </a:defRPr>
@@ -17877,7 +18301,7 @@
               </a:lnSpc>
               <a:defRPr sz="4900" b="1" i="1">
                 <a:solidFill>
-                  <a:srgbClr val="F3F4F6"/>
+                  <a:srgbClr val="FFFFFF"/>
                 </a:solidFill>
                 <a:latin typeface="Calibri"/>
               </a:defRPr>
@@ -17916,7 +18340,7 @@
               </a:lnSpc>
               <a:defRPr sz="3200" b="0" i="0">
                 <a:solidFill>
-                  <a:srgbClr val="DED3F4"/>
+                  <a:srgbClr val="FEF5E4"/>
                 </a:solidFill>
                 <a:latin typeface="Calibri"/>
               </a:defRPr>
@@ -17932,7 +18356,7 @@
               </a:lnSpc>
               <a:defRPr sz="3200" b="0" i="0">
                 <a:solidFill>
-                  <a:srgbClr val="DED3F4"/>
+                  <a:srgbClr val="FEF5E4"/>
                 </a:solidFill>
                 <a:latin typeface="Calibri"/>
               </a:defRPr>
@@ -17948,7 +18372,7 @@
               </a:lnSpc>
               <a:defRPr sz="3200" b="0" i="0">
                 <a:solidFill>
-                  <a:srgbClr val="DED3F4"/>
+                  <a:srgbClr val="FEF5E4"/>
                 </a:solidFill>
                 <a:latin typeface="Calibri"/>
               </a:defRPr>
@@ -17987,7 +18411,7 @@
               </a:lnSpc>
               <a:defRPr sz="4100" b="1" i="0">
                 <a:solidFill>
-                  <a:srgbClr val="C1ACFF"/>
+                  <a:srgbClr val="DDBDFE"/>
                 </a:solidFill>
                 <a:latin typeface="Calibri"/>
               </a:defRPr>
@@ -18026,7 +18450,7 @@
               </a:lnSpc>
               <a:defRPr sz="3600" b="1" i="0">
                 <a:solidFill>
-                  <a:srgbClr val="F3F4F6"/>
+                  <a:srgbClr val="FFFFFF"/>
                 </a:solidFill>
                 <a:latin typeface="Calibri"/>
               </a:defRPr>
@@ -18193,7 +18617,7 @@
                 <a:solidFill>
                   <a:srgbClr val="FFCC4D"/>
                 </a:solidFill>
-                <a:latin typeface="Inter"/>
+                <a:latin typeface="Georgia"/>
               </a:defRPr>
             </a:pPr>
             <a:r>
@@ -18301,7 +18725,7 @@
                 <a:solidFill>
                   <a:srgbClr val="FFCC4D"/>
                 </a:solidFill>
-                <a:latin typeface="Inter"/>
+                <a:latin typeface="Georgia"/>
               </a:defRPr>
             </a:pPr>
             <a:r>
@@ -18409,7 +18833,7 @@
                 <a:solidFill>
                   <a:srgbClr val="FFCC4D"/>
                 </a:solidFill>
-                <a:latin typeface="Inter"/>
+                <a:latin typeface="Georgia"/>
               </a:defRPr>
             </a:pPr>
             <a:r>
@@ -18574,7 +18998,7 @@
                 <a:solidFill>
                   <a:srgbClr val="FFCC4D"/>
                 </a:solidFill>
-                <a:latin typeface="Inter"/>
+                <a:latin typeface="Georgia"/>
               </a:defRPr>
             </a:pPr>
             <a:r>
@@ -18682,7 +19106,7 @@
                 <a:solidFill>
                   <a:srgbClr val="FFCC4D"/>
                 </a:solidFill>
-                <a:latin typeface="Inter"/>
+                <a:latin typeface="Georgia"/>
               </a:defRPr>
             </a:pPr>
             <a:r>
@@ -18790,7 +19214,7 @@
                 <a:solidFill>
                   <a:srgbClr val="FFCC4D"/>
                 </a:solidFill>
-                <a:latin typeface="Inter"/>
+                <a:latin typeface="Georgia"/>
               </a:defRPr>
             </a:pPr>
             <a:r>
@@ -18815,10 +19239,10 @@
         <a:gradFill rotWithShape="1">
           <a:gsLst>
             <a:gs pos="0">
-              <a:srgbClr val="0C0D11"/>
+              <a:srgbClr val="0C0B11"/>
             </a:gs>
             <a:gs pos="100000">
-              <a:srgbClr val="5E616A"/>
+              <a:srgbClr val="5F586C"/>
             </a:gs>
           </a:gsLst>
           <a:lin scaled="0" ang="0"/>
@@ -18850,13 +19274,13 @@
             </a:avLst>
           </a:prstGeom>
           <a:solidFill>
-            <a:srgbClr val="1F2430">
+            <a:srgbClr val="211733">
               <a:alpha val="44706"/>
             </a:srgbClr>
           </a:solidFill>
           <a:ln w="14299" cap="sq">
             <a:solidFill>
-              <a:srgbClr val="6B6E76">
+              <a:srgbClr val="6C6678">
                 <a:alpha val="44706"/>
               </a:srgbClr>
             </a:solidFill>
@@ -18901,13 +19325,13 @@
             </a:avLst>
           </a:prstGeom>
           <a:solidFill>
-            <a:srgbClr val="151820">
+            <a:srgbClr val="161122">
               <a:alpha val="60784"/>
             </a:srgbClr>
           </a:solidFill>
           <a:ln w="14299" cap="sq">
             <a:solidFill>
-              <a:srgbClr val="151820">
+              <a:srgbClr val="161122">
                 <a:alpha val="60784"/>
               </a:srgbClr>
             </a:solidFill>
@@ -18963,7 +19387,7 @@
               </a:lnSpc>
               <a:defRPr sz="3700" b="1" i="0">
                 <a:solidFill>
-                  <a:srgbClr val="D6C8FF"/>
+                  <a:srgbClr val="E8D4FE"/>
                 </a:solidFill>
                 <a:latin typeface="Calibri"/>
               </a:defRPr>
@@ -19002,7 +19426,7 @@
               </a:lnSpc>
               <a:defRPr sz="5800" b="1" i="0">
                 <a:solidFill>
-                  <a:srgbClr val="F3F4F6"/>
+                  <a:srgbClr val="FFFFFF"/>
                 </a:solidFill>
                 <a:latin typeface="Calibri"/>
               </a:defRPr>
@@ -19041,7 +19465,7 @@
               </a:lnSpc>
               <a:defRPr sz="4900" b="1" i="1">
                 <a:solidFill>
-                  <a:srgbClr val="F3F4F6"/>
+                  <a:srgbClr val="FFFFFF"/>
                 </a:solidFill>
                 <a:latin typeface="Calibri"/>
               </a:defRPr>
@@ -19080,7 +19504,7 @@
               </a:lnSpc>
               <a:defRPr sz="3200" b="0" i="0">
                 <a:solidFill>
-                  <a:srgbClr val="DED3F4"/>
+                  <a:srgbClr val="FEF5E4"/>
                 </a:solidFill>
                 <a:latin typeface="Calibri"/>
               </a:defRPr>
@@ -19096,7 +19520,7 @@
               </a:lnSpc>
               <a:defRPr sz="3200" b="0" i="0">
                 <a:solidFill>
-                  <a:srgbClr val="DED3F4"/>
+                  <a:srgbClr val="FEF5E4"/>
                 </a:solidFill>
                 <a:latin typeface="Calibri"/>
               </a:defRPr>
@@ -19112,7 +19536,7 @@
               </a:lnSpc>
               <a:defRPr sz="3200" b="0" i="0">
                 <a:solidFill>
-                  <a:srgbClr val="DED3F4"/>
+                  <a:srgbClr val="FEF5E4"/>
                 </a:solidFill>
                 <a:latin typeface="Calibri"/>
               </a:defRPr>
@@ -19151,7 +19575,7 @@
               </a:lnSpc>
               <a:defRPr sz="4100" b="1" i="0">
                 <a:solidFill>
-                  <a:srgbClr val="C1ACFF"/>
+                  <a:srgbClr val="DDBDFE"/>
                 </a:solidFill>
                 <a:latin typeface="Calibri"/>
               </a:defRPr>
@@ -19190,7 +19614,7 @@
               </a:lnSpc>
               <a:defRPr sz="3600" b="1" i="0">
                 <a:solidFill>
-                  <a:srgbClr val="F3F4F6"/>
+                  <a:srgbClr val="FFFFFF"/>
                 </a:solidFill>
                 <a:latin typeface="Calibri"/>
               </a:defRPr>
@@ -19215,7 +19639,7 @@
     <p:bg>
       <p:bgPr>
         <a:solidFill>
-          <a:srgbClr val="1F2430"/>
+          <a:srgbClr val="211733"/>
         </a:solidFill>
         <a:effectLst/>
       </p:bgPr>
@@ -19258,9 +19682,9 @@
               </a:spcAft>
               <a:defRPr sz="5500" b="1" i="0">
                 <a:solidFill>
-                  <a:srgbClr val="B8A1FF"/>
-                </a:solidFill>
-                <a:latin typeface="Inter"/>
+                  <a:srgbClr val="D8B4FE"/>
+                </a:solidFill>
+                <a:latin typeface="Georgia"/>
               </a:defRPr>
             </a:pPr>
             <a:r>
@@ -19277,9 +19701,9 @@
               </a:spcAft>
               <a:defRPr sz="5500" b="1" i="0">
                 <a:solidFill>
-                  <a:srgbClr val="F3F4F6"/>
-                </a:solidFill>
-                <a:latin typeface="Inter"/>
+                  <a:srgbClr val="FFFFFF"/>
+                </a:solidFill>
+                <a:latin typeface="Georgia"/>
               </a:defRPr>
             </a:pPr>
             <a:r>
@@ -19296,9 +19720,9 @@
               </a:spcAft>
               <a:defRPr sz="5500" b="1" i="0">
                 <a:solidFill>
-                  <a:srgbClr val="B8A1FF"/>
-                </a:solidFill>
-                <a:latin typeface="Inter"/>
+                  <a:srgbClr val="D8B4FE"/>
+                </a:solidFill>
+                <a:latin typeface="Georgia"/>
               </a:defRPr>
             </a:pPr>
             <a:r>
@@ -19315,9 +19739,9 @@
               </a:spcAft>
               <a:defRPr sz="5500" b="1" i="0">
                 <a:solidFill>
-                  <a:srgbClr val="F3F4F6"/>
-                </a:solidFill>
-                <a:latin typeface="Inter"/>
+                  <a:srgbClr val="FFFFFF"/>
+                </a:solidFill>
+                <a:latin typeface="Georgia"/>
               </a:defRPr>
             </a:pPr>
             <a:r>
@@ -19355,9 +19779,9 @@
               </a:spcBef>
               <a:defRPr sz="1200" b="0" i="0">
                 <a:solidFill>
-                  <a:srgbClr val="B8A1FF"/>
-                </a:solidFill>
-                <a:latin typeface="Inter"/>
+                  <a:srgbClr val="D8B4FE"/>
+                </a:solidFill>
+                <a:latin typeface="Georgia"/>
               </a:defRPr>
             </a:pPr>
             <a:r>
